--- a/presentacion/sistema-ciudad-maderas.pptx
+++ b/presentacion/sistema-ciudad-maderas.pptx
@@ -2556,12 +2556,12 @@
         </p:nvSpPr>
         <p:spPr>
           <a:xfrm>
-            <a:off x="640080" y="1600200"/>
-            <a:ext cx="6492240" cy="2286000"/>
+            <a:off x="640080" y="1737360"/>
+            <a:ext cx="6492240" cy="3063240"/>
           </a:xfrm>
           <a:prstGeom prst="roundRect">
             <a:avLst>
-              <a:gd name="adj" fmla="val 3600"/>
+              <a:gd name="adj" fmla="val 2687"/>
             </a:avLst>
           </a:prstGeom>
           <a:solidFill>
@@ -2590,7 +2590,7 @@
         </p:nvSpPr>
         <p:spPr>
           <a:xfrm>
-            <a:off x="960120" y="1828800"/>
+            <a:off x="960120" y="1993392"/>
             <a:ext cx="420624" cy="420624"/>
           </a:xfrm>
           <a:prstGeom prst="ellipse">
@@ -2610,7 +2610,7 @@
         </p:nvSpPr>
         <p:spPr>
           <a:xfrm>
-            <a:off x="960120" y="1828800"/>
+            <a:off x="960120" y="1993392"/>
             <a:ext cx="420624" cy="420624"/>
           </a:xfrm>
           <a:prstGeom prst="rect">
@@ -2649,7 +2649,7 @@
         </p:nvSpPr>
         <p:spPr>
           <a:xfrm>
-            <a:off x="1554480" y="1874520"/>
+            <a:off x="1554480" y="2039112"/>
             <a:ext cx="3657600" cy="320040"/>
           </a:xfrm>
           <a:prstGeom prst="rect">
@@ -2688,12 +2688,12 @@
         </p:nvSpPr>
         <p:spPr>
           <a:xfrm>
-            <a:off x="960120" y="2395728"/>
-            <a:ext cx="5852160" cy="566928"/>
+            <a:off x="960120" y="2651760"/>
+            <a:ext cx="5852160" cy="658368"/>
           </a:xfrm>
           <a:prstGeom prst="roundRect">
             <a:avLst>
-              <a:gd name="adj" fmla="val 22581"/>
+              <a:gd name="adj" fmla="val 19444"/>
             </a:avLst>
           </a:prstGeom>
           <a:solidFill>
@@ -2715,8 +2715,8 @@
         </p:nvSpPr>
         <p:spPr>
           <a:xfrm>
-            <a:off x="1106424" y="2395728"/>
-            <a:ext cx="5559552" cy="566928"/>
+            <a:off x="1106424" y="2651760"/>
+            <a:ext cx="5559552" cy="658368"/>
           </a:xfrm>
           <a:prstGeom prst="rect">
             <a:avLst/>
@@ -2754,7 +2754,7 @@
         </p:nvSpPr>
         <p:spPr>
           <a:xfrm>
-            <a:off x="960120" y="3154680"/>
+            <a:off x="960120" y="3584448"/>
             <a:ext cx="1371600" cy="420624"/>
           </a:xfrm>
           <a:prstGeom prst="roundRect">
@@ -2781,7 +2781,7 @@
         </p:nvSpPr>
         <p:spPr>
           <a:xfrm>
-            <a:off x="960120" y="3154680"/>
+            <a:off x="960120" y="3584448"/>
             <a:ext cx="1371600" cy="420624"/>
           </a:xfrm>
           <a:prstGeom prst="rect">
@@ -2820,7 +2820,7 @@
         </p:nvSpPr>
         <p:spPr>
           <a:xfrm>
-            <a:off x="2478024" y="3154680"/>
+            <a:off x="2478024" y="3584448"/>
             <a:ext cx="1819656" cy="420624"/>
           </a:xfrm>
           <a:prstGeom prst="roundRect">
@@ -2847,7 +2847,7 @@
         </p:nvSpPr>
         <p:spPr>
           <a:xfrm>
-            <a:off x="2478024" y="3154680"/>
+            <a:off x="2478024" y="3584448"/>
             <a:ext cx="1819656" cy="420624"/>
           </a:xfrm>
           <a:prstGeom prst="rect">
@@ -2886,7 +2886,7 @@
         </p:nvSpPr>
         <p:spPr>
           <a:xfrm>
-            <a:off x="4443984" y="3154680"/>
+            <a:off x="4443984" y="3584448"/>
             <a:ext cx="1371600" cy="420624"/>
           </a:xfrm>
           <a:prstGeom prst="roundRect">
@@ -2913,7 +2913,7 @@
         </p:nvSpPr>
         <p:spPr>
           <a:xfrm>
-            <a:off x="4443984" y="3154680"/>
+            <a:off x="4443984" y="3584448"/>
             <a:ext cx="1371600" cy="420624"/>
           </a:xfrm>
           <a:prstGeom prst="rect">
@@ -2952,24 +2952,24 @@
         </p:nvSpPr>
         <p:spPr>
           <a:xfrm>
-            <a:off x="960120" y="3675888"/>
-            <a:ext cx="5852160" cy="274320"/>
-          </a:xfrm>
-          <a:prstGeom prst="rect">
-            <a:avLst/>
-          </a:prstGeom>
-          <a:noFill/>
-          <a:ln/>
-        </p:spPr>
-        <p:txBody>
-          <a:bodyPr wrap="square" lIns="0" tIns="0" rIns="0" bIns="0" rtlCol="0" anchor="ctr"/>
-          <a:lstStyle/>
-          <a:p>
-            <a:pPr indent="0" marL="0">
-              <a:buNone/>
-            </a:pPr>
-            <a:r>
-              <a:rPr lang="en-US" sz="1050" i="1" dirty="0">
+            <a:off x="960120" y="4224528"/>
+            <a:ext cx="5852160" cy="365760"/>
+          </a:xfrm>
+          <a:prstGeom prst="rect">
+            <a:avLst/>
+          </a:prstGeom>
+          <a:noFill/>
+          <a:ln/>
+        </p:spPr>
+        <p:txBody>
+          <a:bodyPr wrap="square" lIns="0" tIns="0" rIns="0" bIns="0" rtlCol="0" anchor="ctr"/>
+          <a:lstStyle/>
+          <a:p>
+            <a:pPr indent="0" marL="0">
+              <a:buNone/>
+            </a:pPr>
+            <a:r>
+              <a:rPr lang="en-US" sz="1150" i="1" dirty="0">
                 <a:solidFill>
                   <a:srgbClr val="5C6B78"/>
                 </a:solidFill>
@@ -2979,7 +2979,7 @@
               </a:rPr>
               <a:t>Los botones son tocables: un dedo y listo. Solo estas tres preguntas los llevan.</a:t>
             </a:r>
-            <a:endParaRPr lang="en-US" sz="1050" dirty="0"/>
+            <a:endParaRPr lang="en-US" sz="1150" dirty="0"/>
           </a:p>
         </p:txBody>
       </p:sp>
@@ -2991,12 +2991,12 @@
         </p:nvSpPr>
         <p:spPr>
           <a:xfrm>
-            <a:off x="7498080" y="1600200"/>
-            <a:ext cx="4023360" cy="2286000"/>
+            <a:off x="7498080" y="1737360"/>
+            <a:ext cx="4023360" cy="3063240"/>
           </a:xfrm>
           <a:prstGeom prst="roundRect">
             <a:avLst>
-              <a:gd name="adj" fmla="val 3600"/>
+              <a:gd name="adj" fmla="val 2687"/>
             </a:avLst>
           </a:prstGeom>
           <a:solidFill>
@@ -3025,7 +3025,7 @@
         </p:nvSpPr>
         <p:spPr>
           <a:xfrm>
-            <a:off x="7818120" y="1828800"/>
+            <a:off x="7818120" y="2057400"/>
             <a:ext cx="3383280" cy="274320"/>
           </a:xfrm>
           <a:prstGeom prst="rect">
@@ -3064,24 +3064,24 @@
         </p:nvSpPr>
         <p:spPr>
           <a:xfrm>
-            <a:off x="7818120" y="2240280"/>
-            <a:ext cx="3383280" cy="1463040"/>
-          </a:xfrm>
-          <a:prstGeom prst="rect">
-            <a:avLst/>
-          </a:prstGeom>
-          <a:noFill/>
-          <a:ln/>
-        </p:spPr>
-        <p:txBody>
-          <a:bodyPr wrap="square" lIns="0" tIns="0" rIns="0" bIns="0" rtlCol="0" anchor="ctr"/>
-          <a:lstStyle/>
-          <a:p>
-            <a:pPr indent="0" marL="0">
-              <a:buNone/>
-            </a:pPr>
-            <a:r>
-              <a:rPr lang="en-US" sz="1300" dirty="0">
+            <a:off x="7818120" y="2560320"/>
+            <a:ext cx="3383280" cy="1920240"/>
+          </a:xfrm>
+          <a:prstGeom prst="rect">
+            <a:avLst/>
+          </a:prstGeom>
+          <a:noFill/>
+          <a:ln/>
+        </p:spPr>
+        <p:txBody>
+          <a:bodyPr wrap="square" lIns="0" tIns="0" rIns="0" bIns="0" rtlCol="0" anchor="ctr"/>
+          <a:lstStyle/>
+          <a:p>
+            <a:pPr indent="0" marL="0">
+              <a:buNone/>
+            </a:pPr>
+            <a:r>
+              <a:rPr lang="en-US" sz="1400" dirty="0">
                 <a:solidFill>
                   <a:srgbClr val="FFFFFF"/>
                 </a:solidFill>
@@ -3091,7 +3091,7 @@
               </a:rPr>
               <a:t>Cierra el cuadro. Con el plazo y la forma de pago ya se puede calificar, aunque falte todo lo demás.</a:t>
             </a:r>
-            <a:endParaRPr lang="en-US" sz="1300" dirty="0"/>
+            <a:endParaRPr lang="en-US" sz="1400" dirty="0"/>
           </a:p>
         </p:txBody>
       </p:sp>
@@ -3103,12 +3103,12 @@
         </p:nvSpPr>
         <p:spPr>
           <a:xfrm>
-            <a:off x="640080" y="4160520"/>
-            <a:ext cx="10881360" cy="1051560"/>
+            <a:off x="640080" y="5029200"/>
+            <a:ext cx="10881360" cy="1188720"/>
           </a:xfrm>
           <a:prstGeom prst="roundRect">
             <a:avLst>
-              <a:gd name="adj" fmla="val 7826"/>
+              <a:gd name="adj" fmla="val 6923"/>
             </a:avLst>
           </a:prstGeom>
           <a:solidFill>
@@ -3137,24 +3137,24 @@
         </p:nvSpPr>
         <p:spPr>
           <a:xfrm>
-            <a:off x="1005840" y="4160520"/>
-            <a:ext cx="10149840" cy="1051560"/>
-          </a:xfrm>
-          <a:prstGeom prst="rect">
-            <a:avLst/>
-          </a:prstGeom>
-          <a:noFill/>
-          <a:ln/>
-        </p:spPr>
-        <p:txBody>
-          <a:bodyPr wrap="square" lIns="0" tIns="0" rIns="0" bIns="0" rtlCol="0" anchor="ctr"/>
-          <a:lstStyle/>
-          <a:p>
-            <a:pPr indent="0" marL="0">
-              <a:buNone/>
-            </a:pPr>
-            <a:r>
-              <a:rPr lang="en-US" sz="1350" dirty="0">
+            <a:off x="1005840" y="5029200"/>
+            <a:ext cx="10149840" cy="1188720"/>
+          </a:xfrm>
+          <a:prstGeom prst="rect">
+            <a:avLst/>
+          </a:prstGeom>
+          <a:noFill/>
+          <a:ln/>
+        </p:spPr>
+        <p:txBody>
+          <a:bodyPr wrap="square" lIns="0" tIns="0" rIns="0" bIns="0" rtlCol="0" anchor="ctr"/>
+          <a:lstStyle/>
+          <a:p>
+            <a:pPr indent="0" marL="0">
+              <a:buNone/>
+            </a:pPr>
+            <a:r>
+              <a:rPr lang="en-US" sz="1450" dirty="0">
                 <a:solidFill>
                   <a:srgbClr val="11253A"/>
                 </a:solidFill>
@@ -3164,7 +3164,7 @@
               </a:rPr>
               <a:t>En cuanto se sabe esto, el prospecto queda registrado en el panel — antes de pedirle el nombre.</a:t>
             </a:r>
-            <a:endParaRPr lang="en-US" sz="1350" dirty="0"/>
+            <a:endParaRPr lang="en-US" sz="1450" dirty="0"/>
           </a:p>
         </p:txBody>
       </p:sp>
@@ -3287,11 +3287,11 @@
         <p:spPr>
           <a:xfrm>
             <a:off x="640080" y="1874520"/>
-            <a:ext cx="5257800" cy="1920240"/>
+            <a:ext cx="5257800" cy="2240280"/>
           </a:xfrm>
           <a:prstGeom prst="roundRect">
             <a:avLst>
-              <a:gd name="adj" fmla="val 4286"/>
+              <a:gd name="adj" fmla="val 3673"/>
             </a:avLst>
           </a:prstGeom>
           <a:solidFill>
@@ -3320,7 +3320,7 @@
         </p:nvSpPr>
         <p:spPr>
           <a:xfrm>
-            <a:off x="960120" y="2103120"/>
+            <a:off x="960120" y="2148840"/>
             <a:ext cx="420624" cy="420624"/>
           </a:xfrm>
           <a:prstGeom prst="ellipse">
@@ -3340,7 +3340,7 @@
         </p:nvSpPr>
         <p:spPr>
           <a:xfrm>
-            <a:off x="960120" y="2103120"/>
+            <a:off x="960120" y="2148840"/>
             <a:ext cx="420624" cy="420624"/>
           </a:xfrm>
           <a:prstGeom prst="rect">
@@ -3379,7 +3379,7 @@
         </p:nvSpPr>
         <p:spPr>
           <a:xfrm>
-            <a:off x="1554480" y="2148840"/>
+            <a:off x="1554480" y="2194560"/>
             <a:ext cx="4023360" cy="320040"/>
           </a:xfrm>
           <a:prstGeom prst="rect">
@@ -3418,12 +3418,12 @@
         </p:nvSpPr>
         <p:spPr>
           <a:xfrm>
-            <a:off x="960120" y="2697480"/>
-            <a:ext cx="4617720" cy="777240"/>
+            <a:off x="960120" y="2880360"/>
+            <a:ext cx="4617720" cy="658368"/>
           </a:xfrm>
           <a:prstGeom prst="roundRect">
             <a:avLst>
-              <a:gd name="adj" fmla="val 16471"/>
+              <a:gd name="adj" fmla="val 19444"/>
             </a:avLst>
           </a:prstGeom>
           <a:solidFill>
@@ -3445,8 +3445,8 @@
         </p:nvSpPr>
         <p:spPr>
           <a:xfrm>
-            <a:off x="1106424" y="2697480"/>
-            <a:ext cx="4325112" cy="777240"/>
+            <a:off x="1106424" y="2880360"/>
+            <a:ext cx="4325112" cy="658368"/>
           </a:xfrm>
           <a:prstGeom prst="rect">
             <a:avLst/>
@@ -3485,11 +3485,11 @@
         <p:spPr>
           <a:xfrm>
             <a:off x="6263640" y="1874520"/>
-            <a:ext cx="5257800" cy="1920240"/>
+            <a:ext cx="5257800" cy="2240280"/>
           </a:xfrm>
           <a:prstGeom prst="roundRect">
             <a:avLst>
-              <a:gd name="adj" fmla="val 4286"/>
+              <a:gd name="adj" fmla="val 3673"/>
             </a:avLst>
           </a:prstGeom>
           <a:solidFill>
@@ -3518,7 +3518,7 @@
         </p:nvSpPr>
         <p:spPr>
           <a:xfrm>
-            <a:off x="6583680" y="2103120"/>
+            <a:off x="6583680" y="2148840"/>
             <a:ext cx="420624" cy="420624"/>
           </a:xfrm>
           <a:prstGeom prst="ellipse">
@@ -3538,7 +3538,7 @@
         </p:nvSpPr>
         <p:spPr>
           <a:xfrm>
-            <a:off x="6583680" y="2103120"/>
+            <a:off x="6583680" y="2148840"/>
             <a:ext cx="420624" cy="420624"/>
           </a:xfrm>
           <a:prstGeom prst="rect">
@@ -3577,7 +3577,7 @@
         </p:nvSpPr>
         <p:spPr>
           <a:xfrm>
-            <a:off x="7178040" y="2148840"/>
+            <a:off x="7178040" y="2194560"/>
             <a:ext cx="4023360" cy="320040"/>
           </a:xfrm>
           <a:prstGeom prst="rect">
@@ -3616,12 +3616,12 @@
         </p:nvSpPr>
         <p:spPr>
           <a:xfrm>
-            <a:off x="6583680" y="2697480"/>
-            <a:ext cx="4617720" cy="777240"/>
+            <a:off x="6583680" y="2880360"/>
+            <a:ext cx="4617720" cy="914400"/>
           </a:xfrm>
           <a:prstGeom prst="roundRect">
             <a:avLst>
-              <a:gd name="adj" fmla="val 16471"/>
+              <a:gd name="adj" fmla="val 14000"/>
             </a:avLst>
           </a:prstGeom>
           <a:solidFill>
@@ -3643,8 +3643,8 @@
         </p:nvSpPr>
         <p:spPr>
           <a:xfrm>
-            <a:off x="6729984" y="2697480"/>
-            <a:ext cx="4325112" cy="777240"/>
+            <a:off x="6729984" y="2880360"/>
+            <a:ext cx="4325112" cy="914400"/>
           </a:xfrm>
           <a:prstGeom prst="rect">
             <a:avLst/>
@@ -3682,12 +3682,12 @@
         </p:nvSpPr>
         <p:spPr>
           <a:xfrm>
-            <a:off x="640080" y="4114800"/>
-            <a:ext cx="10881360" cy="1234440"/>
+            <a:off x="640080" y="4892040"/>
+            <a:ext cx="10881360" cy="1325880"/>
           </a:xfrm>
           <a:prstGeom prst="roundRect">
             <a:avLst>
-              <a:gd name="adj" fmla="val 6667"/>
+              <a:gd name="adj" fmla="val 6207"/>
             </a:avLst>
           </a:prstGeom>
           <a:solidFill>
@@ -3716,24 +3716,24 @@
         </p:nvSpPr>
         <p:spPr>
           <a:xfrm>
-            <a:off x="1005840" y="4114800"/>
-            <a:ext cx="10149840" cy="1234440"/>
-          </a:xfrm>
-          <a:prstGeom prst="rect">
-            <a:avLst/>
-          </a:prstGeom>
-          <a:noFill/>
-          <a:ln/>
-        </p:spPr>
-        <p:txBody>
-          <a:bodyPr wrap="square" lIns="0" tIns="0" rIns="0" bIns="0" rtlCol="0" anchor="ctr"/>
-          <a:lstStyle/>
-          <a:p>
-            <a:pPr indent="0" marL="0">
-              <a:buNone/>
-            </a:pPr>
-            <a:r>
-              <a:rPr lang="en-US" sz="1350" dirty="0">
+            <a:off x="1005840" y="4892040"/>
+            <a:ext cx="10149840" cy="1325880"/>
+          </a:xfrm>
+          <a:prstGeom prst="rect">
+            <a:avLst/>
+          </a:prstGeom>
+          <a:noFill/>
+          <a:ln/>
+        </p:spPr>
+        <p:txBody>
+          <a:bodyPr wrap="square" lIns="0" tIns="0" rIns="0" bIns="0" rtlCol="0" anchor="ctr"/>
+          <a:lstStyle/>
+          <a:p>
+            <a:pPr indent="0" marL="0">
+              <a:buNone/>
+            </a:pPr>
+            <a:r>
+              <a:rPr lang="en-US" sz="1450" dirty="0">
                 <a:solidFill>
                   <a:srgbClr val="11253A"/>
                 </a:solidFill>
@@ -3743,7 +3743,7 @@
               </a:rPr>
               <a:t>Estas dos NO llevan botones: son preguntas abiertas. Pedir nombre y teléfono juntos es la forma más rápida de que alguien deje de contestar.</a:t>
             </a:r>
-            <a:endParaRPr lang="en-US" sz="1350" dirty="0"/>
+            <a:endParaRPr lang="en-US" sz="1450" dirty="0"/>
           </a:p>
         </p:txBody>
       </p:sp>
@@ -3866,11 +3866,11 @@
         <p:spPr>
           <a:xfrm>
             <a:off x="640080" y="1828800"/>
-            <a:ext cx="3429000" cy="3063240"/>
+            <a:ext cx="3429000" cy="3703320"/>
           </a:xfrm>
           <a:prstGeom prst="roundRect">
             <a:avLst>
-              <a:gd name="adj" fmla="val 2687"/>
+              <a:gd name="adj" fmla="val 2400"/>
             </a:avLst>
           </a:prstGeom>
           <a:solidFill>
@@ -3958,24 +3958,24 @@
         </p:nvSpPr>
         <p:spPr>
           <a:xfrm>
-            <a:off x="960120" y="2606040"/>
-            <a:ext cx="2788920" cy="1371600"/>
-          </a:xfrm>
-          <a:prstGeom prst="rect">
-            <a:avLst/>
-          </a:prstGeom>
-          <a:noFill/>
-          <a:ln/>
-        </p:spPr>
-        <p:txBody>
-          <a:bodyPr wrap="square" lIns="0" tIns="0" rIns="0" bIns="0" rtlCol="0" anchor="ctr"/>
-          <a:lstStyle/>
-          <a:p>
-            <a:pPr indent="0" marL="0">
-              <a:buNone/>
-            </a:pPr>
-            <a:r>
-              <a:rPr lang="en-US" sz="1300" dirty="0">
+            <a:off x="960120" y="2697480"/>
+            <a:ext cx="2788920" cy="1965960"/>
+          </a:xfrm>
+          <a:prstGeom prst="rect">
+            <a:avLst/>
+          </a:prstGeom>
+          <a:noFill/>
+          <a:ln/>
+        </p:spPr>
+        <p:txBody>
+          <a:bodyPr wrap="square" lIns="0" tIns="0" rIns="0" bIns="0" rtlCol="0" anchor="ctr"/>
+          <a:lstStyle/>
+          <a:p>
+            <a:pPr indent="0" marL="0">
+              <a:buNone/>
+            </a:pPr>
+            <a:r>
+              <a:rPr lang="en-US" sz="1400" dirty="0">
                 <a:solidFill>
                   <a:srgbClr val="5C6B78"/>
                 </a:solidFill>
@@ -3985,20 +3985,20 @@
               </a:rPr>
               <a:t>Compra este mes y ya sabe cómo va a pagar.</a:t>
             </a:r>
-            <a:endParaRPr lang="en-US" sz="1300" dirty="0"/>
-          </a:p>
-          <a:p>
-            <a:pPr indent="0" marL="0">
-              <a:buNone/>
-            </a:pPr>
-            <a:endParaRPr lang="en-US" sz="1300" dirty="0"/>
-          </a:p>
-          <a:p>
-            <a:pPr indent="0" marL="0">
-              <a:buNone/>
-            </a:pPr>
-            <a:r>
-              <a:rPr lang="en-US" sz="1300" dirty="0">
+            <a:endParaRPr lang="en-US" sz="1400" dirty="0"/>
+          </a:p>
+          <a:p>
+            <a:pPr indent="0" marL="0">
+              <a:buNone/>
+            </a:pPr>
+            <a:endParaRPr lang="en-US" sz="1400" dirty="0"/>
+          </a:p>
+          <a:p>
+            <a:pPr indent="0" marL="0">
+              <a:buNone/>
+            </a:pPr>
+            <a:r>
+              <a:rPr lang="en-US" sz="1400" dirty="0">
                 <a:solidFill>
                   <a:srgbClr val="5C6B78"/>
                 </a:solidFill>
@@ -4008,7 +4008,7 @@
               </a:rPr>
               <a:t>También el inversionista de contado a 3–6 meses.</a:t>
             </a:r>
-            <a:endParaRPr lang="en-US" sz="1300" dirty="0"/>
+            <a:endParaRPr lang="en-US" sz="1400" dirty="0"/>
           </a:p>
         </p:txBody>
       </p:sp>
@@ -4020,12 +4020,12 @@
         </p:nvSpPr>
         <p:spPr>
           <a:xfrm>
-            <a:off x="960120" y="4114800"/>
-            <a:ext cx="2788920" cy="530352"/>
+            <a:off x="960120" y="4800600"/>
+            <a:ext cx="2788920" cy="566928"/>
           </a:xfrm>
           <a:prstGeom prst="roundRect">
             <a:avLst>
-              <a:gd name="adj" fmla="val 17241"/>
+              <a:gd name="adj" fmla="val 16129"/>
             </a:avLst>
           </a:prstGeom>
           <a:solidFill>
@@ -4047,8 +4047,8 @@
         </p:nvSpPr>
         <p:spPr>
           <a:xfrm>
-            <a:off x="960120" y="4114800"/>
-            <a:ext cx="2788920" cy="530352"/>
+            <a:off x="960120" y="4800600"/>
+            <a:ext cx="2788920" cy="566928"/>
           </a:xfrm>
           <a:prstGeom prst="rect">
             <a:avLst/>
@@ -4064,7 +4064,7 @@
               <a:buNone/>
             </a:pPr>
             <a:r>
-              <a:rPr lang="en-US" sz="1150" b="1" dirty="0">
+              <a:rPr lang="en-US" sz="1200" b="1" dirty="0">
                 <a:solidFill>
                   <a:srgbClr val="C1462F"/>
                 </a:solidFill>
@@ -4074,7 +4074,7 @@
               </a:rPr>
               <a:t>Aviso inmediato al asesor</a:t>
             </a:r>
-            <a:endParaRPr lang="en-US" sz="1150" dirty="0"/>
+            <a:endParaRPr lang="en-US" sz="1200" dirty="0"/>
           </a:p>
         </p:txBody>
       </p:sp>
@@ -4087,11 +4087,11 @@
         <p:spPr>
           <a:xfrm>
             <a:off x="4434840" y="1828800"/>
-            <a:ext cx="3429000" cy="3063240"/>
+            <a:ext cx="3429000" cy="3703320"/>
           </a:xfrm>
           <a:prstGeom prst="roundRect">
             <a:avLst>
-              <a:gd name="adj" fmla="val 2687"/>
+              <a:gd name="adj" fmla="val 2400"/>
             </a:avLst>
           </a:prstGeom>
           <a:solidFill>
@@ -4179,24 +4179,24 @@
         </p:nvSpPr>
         <p:spPr>
           <a:xfrm>
-            <a:off x="4754880" y="2606040"/>
-            <a:ext cx="2788920" cy="1371600"/>
-          </a:xfrm>
-          <a:prstGeom prst="rect">
-            <a:avLst/>
-          </a:prstGeom>
-          <a:noFill/>
-          <a:ln/>
-        </p:spPr>
-        <p:txBody>
-          <a:bodyPr wrap="square" lIns="0" tIns="0" rIns="0" bIns="0" rtlCol="0" anchor="ctr"/>
-          <a:lstStyle/>
-          <a:p>
-            <a:pPr indent="0" marL="0">
-              <a:buNone/>
-            </a:pPr>
-            <a:r>
-              <a:rPr lang="en-US" sz="1300" dirty="0">
+            <a:off x="4754880" y="2697480"/>
+            <a:ext cx="2788920" cy="1965960"/>
+          </a:xfrm>
+          <a:prstGeom prst="rect">
+            <a:avLst/>
+          </a:prstGeom>
+          <a:noFill/>
+          <a:ln/>
+        </p:spPr>
+        <p:txBody>
+          <a:bodyPr wrap="square" lIns="0" tIns="0" rIns="0" bIns="0" rtlCol="0" anchor="ctr"/>
+          <a:lstStyle/>
+          <a:p>
+            <a:pPr indent="0" marL="0">
+              <a:buNone/>
+            </a:pPr>
+            <a:r>
+              <a:rPr lang="en-US" sz="1400" dirty="0">
                 <a:solidFill>
                   <a:srgbClr val="5C6B78"/>
                 </a:solidFill>
@@ -4206,7 +4206,7 @@
               </a:rPr>
               <a:t>De 3 a 6 meses, o compra pronto pero sin definir todavía cómo paga.</a:t>
             </a:r>
-            <a:endParaRPr lang="en-US" sz="1300" dirty="0"/>
+            <a:endParaRPr lang="en-US" sz="1400" dirty="0"/>
           </a:p>
         </p:txBody>
       </p:sp>
@@ -4218,12 +4218,12 @@
         </p:nvSpPr>
         <p:spPr>
           <a:xfrm>
-            <a:off x="4754880" y="4114800"/>
-            <a:ext cx="2788920" cy="530352"/>
+            <a:off x="4754880" y="4800600"/>
+            <a:ext cx="2788920" cy="566928"/>
           </a:xfrm>
           <a:prstGeom prst="roundRect">
             <a:avLst>
-              <a:gd name="adj" fmla="val 17241"/>
+              <a:gd name="adj" fmla="val 16129"/>
             </a:avLst>
           </a:prstGeom>
           <a:solidFill>
@@ -4245,8 +4245,8 @@
         </p:nvSpPr>
         <p:spPr>
           <a:xfrm>
-            <a:off x="4754880" y="4114800"/>
-            <a:ext cx="2788920" cy="530352"/>
+            <a:off x="4754880" y="4800600"/>
+            <a:ext cx="2788920" cy="566928"/>
           </a:xfrm>
           <a:prstGeom prst="rect">
             <a:avLst/>
@@ -4262,7 +4262,7 @@
               <a:buNone/>
             </a:pPr>
             <a:r>
-              <a:rPr lang="en-US" sz="1150" b="1" dirty="0">
+              <a:rPr lang="en-US" sz="1200" b="1" dirty="0">
                 <a:solidFill>
                   <a:srgbClr val="5C6B78"/>
                 </a:solidFill>
@@ -4272,7 +4272,7 @@
               </a:rPr>
               <a:t>Queda en la lista, sin aviso</a:t>
             </a:r>
-            <a:endParaRPr lang="en-US" sz="1150" dirty="0"/>
+            <a:endParaRPr lang="en-US" sz="1200" dirty="0"/>
           </a:p>
         </p:txBody>
       </p:sp>
@@ -4285,11 +4285,11 @@
         <p:spPr>
           <a:xfrm>
             <a:off x="8229600" y="1828800"/>
-            <a:ext cx="3429000" cy="3063240"/>
+            <a:ext cx="3429000" cy="3703320"/>
           </a:xfrm>
           <a:prstGeom prst="roundRect">
             <a:avLst>
-              <a:gd name="adj" fmla="val 2687"/>
+              <a:gd name="adj" fmla="val 2400"/>
             </a:avLst>
           </a:prstGeom>
           <a:solidFill>
@@ -4377,24 +4377,24 @@
         </p:nvSpPr>
         <p:spPr>
           <a:xfrm>
-            <a:off x="8549640" y="2606040"/>
-            <a:ext cx="2788920" cy="1371600"/>
-          </a:xfrm>
-          <a:prstGeom prst="rect">
-            <a:avLst/>
-          </a:prstGeom>
-          <a:noFill/>
-          <a:ln/>
-        </p:spPr>
-        <p:txBody>
-          <a:bodyPr wrap="square" lIns="0" tIns="0" rIns="0" bIns="0" rtlCol="0" anchor="ctr"/>
-          <a:lstStyle/>
-          <a:p>
-            <a:pPr indent="0" marL="0">
-              <a:buNone/>
-            </a:pPr>
-            <a:r>
-              <a:rPr lang="en-US" sz="1300" dirty="0">
+            <a:off x="8549640" y="2697480"/>
+            <a:ext cx="2788920" cy="1965960"/>
+          </a:xfrm>
+          <a:prstGeom prst="rect">
+            <a:avLst/>
+          </a:prstGeom>
+          <a:noFill/>
+          <a:ln/>
+        </p:spPr>
+        <p:txBody>
+          <a:bodyPr wrap="square" lIns="0" tIns="0" rIns="0" bIns="0" rtlCol="0" anchor="ctr"/>
+          <a:lstStyle/>
+          <a:p>
+            <a:pPr indent="0" marL="0">
+              <a:buNone/>
+            </a:pPr>
+            <a:r>
+              <a:rPr lang="en-US" sz="1400" dirty="0">
                 <a:solidFill>
                   <a:srgbClr val="5C6B78"/>
                 </a:solidFill>
@@ -4404,7 +4404,7 @@
               </a:rPr>
               <a:t>Solo está cotizando. Pague como pague, nunca sube de aquí.</a:t>
             </a:r>
-            <a:endParaRPr lang="en-US" sz="1300" dirty="0"/>
+            <a:endParaRPr lang="en-US" sz="1400" dirty="0"/>
           </a:p>
         </p:txBody>
       </p:sp>
@@ -4416,12 +4416,12 @@
         </p:nvSpPr>
         <p:spPr>
           <a:xfrm>
-            <a:off x="8549640" y="4114800"/>
-            <a:ext cx="2788920" cy="530352"/>
+            <a:off x="8549640" y="4800600"/>
+            <a:ext cx="2788920" cy="566928"/>
           </a:xfrm>
           <a:prstGeom prst="roundRect">
             <a:avLst>
-              <a:gd name="adj" fmla="val 17241"/>
+              <a:gd name="adj" fmla="val 16129"/>
             </a:avLst>
           </a:prstGeom>
           <a:solidFill>
@@ -4443,8 +4443,8 @@
         </p:nvSpPr>
         <p:spPr>
           <a:xfrm>
-            <a:off x="8549640" y="4114800"/>
-            <a:ext cx="2788920" cy="530352"/>
+            <a:off x="8549640" y="4800600"/>
+            <a:ext cx="2788920" cy="566928"/>
           </a:xfrm>
           <a:prstGeom prst="rect">
             <a:avLst/>
@@ -4460,7 +4460,7 @@
               <a:buNone/>
             </a:pPr>
             <a:r>
-              <a:rPr lang="en-US" sz="1150" b="1" dirty="0">
+              <a:rPr lang="en-US" sz="1200" b="1" dirty="0">
                 <a:solidFill>
                   <a:srgbClr val="5C6B78"/>
                 </a:solidFill>
@@ -4470,7 +4470,7 @@
               </a:rPr>
               <a:t>Se guarda, sin aviso</a:t>
             </a:r>
-            <a:endParaRPr lang="en-US" sz="1150" dirty="0"/>
+            <a:endParaRPr lang="en-US" sz="1200" dirty="0"/>
           </a:p>
         </p:txBody>
       </p:sp>
@@ -4482,7 +4482,7 @@
         </p:nvSpPr>
         <p:spPr>
           <a:xfrm>
-            <a:off x="640080" y="5166360"/>
+            <a:off x="640080" y="5943600"/>
             <a:ext cx="10881360" cy="457200"/>
           </a:xfrm>
           <a:prstGeom prst="rect">
@@ -4631,7 +4631,7 @@
         </p:nvSpPr>
         <p:spPr>
           <a:xfrm>
-            <a:off x="640080" y="1874520"/>
+            <a:off x="640080" y="1965960"/>
             <a:ext cx="2103120" cy="365760"/>
           </a:xfrm>
           <a:prstGeom prst="rect">
@@ -4670,7 +4670,7 @@
         </p:nvSpPr>
         <p:spPr>
           <a:xfrm>
-            <a:off x="2743200" y="1874520"/>
+            <a:off x="2743200" y="1965960"/>
             <a:ext cx="2148840" cy="365760"/>
           </a:xfrm>
           <a:prstGeom prst="rect">
@@ -4709,7 +4709,7 @@
         </p:nvSpPr>
         <p:spPr>
           <a:xfrm>
-            <a:off x="4892040" y="1874520"/>
+            <a:off x="4892040" y="1965960"/>
             <a:ext cx="685800" cy="365760"/>
           </a:xfrm>
           <a:prstGeom prst="rect">
@@ -4748,7 +4748,7 @@
         </p:nvSpPr>
         <p:spPr>
           <a:xfrm>
-            <a:off x="5577840" y="1874520"/>
+            <a:off x="5577840" y="1965960"/>
             <a:ext cx="2743200" cy="365760"/>
           </a:xfrm>
           <a:prstGeom prst="rect">
@@ -4787,7 +4787,7 @@
         </p:nvSpPr>
         <p:spPr>
           <a:xfrm>
-            <a:off x="8321040" y="1874520"/>
+            <a:off x="8321040" y="1965960"/>
             <a:ext cx="685800" cy="365760"/>
           </a:xfrm>
           <a:prstGeom prst="rect">
@@ -4826,7 +4826,7 @@
         </p:nvSpPr>
         <p:spPr>
           <a:xfrm>
-            <a:off x="9006840" y="1874520"/>
+            <a:off x="9006840" y="1965960"/>
             <a:ext cx="1828800" cy="365760"/>
           </a:xfrm>
           <a:prstGeom prst="rect">
@@ -4865,7 +4865,7 @@
         </p:nvSpPr>
         <p:spPr>
           <a:xfrm>
-            <a:off x="10835640" y="1874520"/>
+            <a:off x="10835640" y="1965960"/>
             <a:ext cx="685800" cy="365760"/>
           </a:xfrm>
           <a:prstGeom prst="rect">
@@ -4904,12 +4904,12 @@
         </p:nvSpPr>
         <p:spPr>
           <a:xfrm>
-            <a:off x="640080" y="2286000"/>
-            <a:ext cx="10881360" cy="566928"/>
+            <a:off x="640080" y="2423160"/>
+            <a:ext cx="10881360" cy="713232"/>
           </a:xfrm>
           <a:prstGeom prst="roundRect">
             <a:avLst>
-              <a:gd name="adj" fmla="val 11290"/>
+              <a:gd name="adj" fmla="val 8974"/>
             </a:avLst>
           </a:prstGeom>
           <a:solidFill>
@@ -4931,8 +4931,8 @@
         </p:nvSpPr>
         <p:spPr>
           <a:xfrm>
-            <a:off x="777240" y="2286000"/>
-            <a:ext cx="1965960" cy="566928"/>
+            <a:off x="777240" y="2423160"/>
+            <a:ext cx="1965960" cy="713232"/>
           </a:xfrm>
           <a:prstGeom prst="rect">
             <a:avLst/>
@@ -4948,7 +4948,7 @@
               <a:buNone/>
             </a:pPr>
             <a:r>
-              <a:rPr lang="en-US" sz="1250" b="1" dirty="0">
+              <a:rPr lang="en-US" sz="1350" b="1" dirty="0">
                 <a:solidFill>
                   <a:srgbClr val="11253A"/>
                 </a:solidFill>
@@ -4958,7 +4958,7 @@
               </a:rPr>
               <a:t>Plazo</a:t>
             </a:r>
-            <a:endParaRPr lang="en-US" sz="1250" dirty="0"/>
+            <a:endParaRPr lang="en-US" sz="1350" dirty="0"/>
           </a:p>
         </p:txBody>
       </p:sp>
@@ -4970,8 +4970,8 @@
         </p:nvSpPr>
         <p:spPr>
           <a:xfrm>
-            <a:off x="2880360" y="2286000"/>
-            <a:ext cx="2148840" cy="566928"/>
+            <a:off x="2880360" y="2423160"/>
+            <a:ext cx="2148840" cy="713232"/>
           </a:xfrm>
           <a:prstGeom prst="rect">
             <a:avLst/>
@@ -4987,7 +4987,7 @@
               <a:buNone/>
             </a:pPr>
             <a:r>
-              <a:rPr lang="en-US" sz="1250" dirty="0">
+              <a:rPr lang="en-US" sz="1350" dirty="0">
                 <a:solidFill>
                   <a:srgbClr val="5C6B78"/>
                 </a:solidFill>
@@ -4997,7 +4997,7 @@
               </a:rPr>
               <a:t>Este mes</a:t>
             </a:r>
-            <a:endParaRPr lang="en-US" sz="1250" dirty="0"/>
+            <a:endParaRPr lang="en-US" sz="1350" dirty="0"/>
           </a:p>
         </p:txBody>
       </p:sp>
@@ -5009,8 +5009,8 @@
         </p:nvSpPr>
         <p:spPr>
           <a:xfrm>
-            <a:off x="5029200" y="2286000"/>
-            <a:ext cx="685800" cy="566928"/>
+            <a:off x="5029200" y="2423160"/>
+            <a:ext cx="685800" cy="713232"/>
           </a:xfrm>
           <a:prstGeom prst="rect">
             <a:avLst/>
@@ -5026,7 +5026,7 @@
               <a:buNone/>
             </a:pPr>
             <a:r>
-              <a:rPr lang="en-US" sz="1250" b="1" dirty="0">
+              <a:rPr lang="en-US" sz="1350" b="1" dirty="0">
                 <a:solidFill>
                   <a:srgbClr val="B4A269"/>
                 </a:solidFill>
@@ -5036,7 +5036,7 @@
               </a:rPr>
               <a:t>3</a:t>
             </a:r>
-            <a:endParaRPr lang="en-US" sz="1250" dirty="0"/>
+            <a:endParaRPr lang="en-US" sz="1350" dirty="0"/>
           </a:p>
         </p:txBody>
       </p:sp>
@@ -5048,8 +5048,8 @@
         </p:nvSpPr>
         <p:spPr>
           <a:xfrm>
-            <a:off x="5715000" y="2286000"/>
-            <a:ext cx="2743200" cy="566928"/>
+            <a:off x="5715000" y="2423160"/>
+            <a:ext cx="2743200" cy="713232"/>
           </a:xfrm>
           <a:prstGeom prst="rect">
             <a:avLst/>
@@ -5065,7 +5065,7 @@
               <a:buNone/>
             </a:pPr>
             <a:r>
-              <a:rPr lang="en-US" sz="1250" dirty="0">
+              <a:rPr lang="en-US" sz="1350" dirty="0">
                 <a:solidFill>
                   <a:srgbClr val="5C6B78"/>
                 </a:solidFill>
@@ -5075,7 +5075,7 @@
               </a:rPr>
               <a:t>3 a 6 meses</a:t>
             </a:r>
-            <a:endParaRPr lang="en-US" sz="1250" dirty="0"/>
+            <a:endParaRPr lang="en-US" sz="1350" dirty="0"/>
           </a:p>
         </p:txBody>
       </p:sp>
@@ -5087,8 +5087,8 @@
         </p:nvSpPr>
         <p:spPr>
           <a:xfrm>
-            <a:off x="8458200" y="2286000"/>
-            <a:ext cx="685800" cy="566928"/>
+            <a:off x="8458200" y="2423160"/>
+            <a:ext cx="685800" cy="713232"/>
           </a:xfrm>
           <a:prstGeom prst="rect">
             <a:avLst/>
@@ -5104,7 +5104,7 @@
               <a:buNone/>
             </a:pPr>
             <a:r>
-              <a:rPr lang="en-US" sz="1250" b="1" dirty="0">
+              <a:rPr lang="en-US" sz="1350" b="1" dirty="0">
                 <a:solidFill>
                   <a:srgbClr val="B4A269"/>
                 </a:solidFill>
@@ -5114,7 +5114,7 @@
               </a:rPr>
               <a:t>2</a:t>
             </a:r>
-            <a:endParaRPr lang="en-US" sz="1250" dirty="0"/>
+            <a:endParaRPr lang="en-US" sz="1350" dirty="0"/>
           </a:p>
         </p:txBody>
       </p:sp>
@@ -5126,8 +5126,8 @@
         </p:nvSpPr>
         <p:spPr>
           <a:xfrm>
-            <a:off x="9144000" y="2286000"/>
-            <a:ext cx="1828800" cy="566928"/>
+            <a:off x="9144000" y="2423160"/>
+            <a:ext cx="1828800" cy="713232"/>
           </a:xfrm>
           <a:prstGeom prst="rect">
             <a:avLst/>
@@ -5143,7 +5143,7 @@
               <a:buNone/>
             </a:pPr>
             <a:r>
-              <a:rPr lang="en-US" sz="1250" dirty="0">
+              <a:rPr lang="en-US" sz="1350" dirty="0">
                 <a:solidFill>
                   <a:srgbClr val="5C6B78"/>
                 </a:solidFill>
@@ -5153,7 +5153,7 @@
               </a:rPr>
               <a:t>Solo cotizando</a:t>
             </a:r>
-            <a:endParaRPr lang="en-US" sz="1250" dirty="0"/>
+            <a:endParaRPr lang="en-US" sz="1350" dirty="0"/>
           </a:p>
         </p:txBody>
       </p:sp>
@@ -5165,8 +5165,8 @@
         </p:nvSpPr>
         <p:spPr>
           <a:xfrm>
-            <a:off x="10972800" y="2286000"/>
-            <a:ext cx="685800" cy="566928"/>
+            <a:off x="10972800" y="2423160"/>
+            <a:ext cx="685800" cy="713232"/>
           </a:xfrm>
           <a:prstGeom prst="rect">
             <a:avLst/>
@@ -5182,7 +5182,7 @@
               <a:buNone/>
             </a:pPr>
             <a:r>
-              <a:rPr lang="en-US" sz="1250" b="1" dirty="0">
+              <a:rPr lang="en-US" sz="1350" b="1" dirty="0">
                 <a:solidFill>
                   <a:srgbClr val="B4A269"/>
                 </a:solidFill>
@@ -5192,7 +5192,7 @@
               </a:rPr>
               <a:t>1</a:t>
             </a:r>
-            <a:endParaRPr lang="en-US" sz="1250" dirty="0"/>
+            <a:endParaRPr lang="en-US" sz="1350" dirty="0"/>
           </a:p>
         </p:txBody>
       </p:sp>
@@ -5204,12 +5204,12 @@
         </p:nvSpPr>
         <p:spPr>
           <a:xfrm>
-            <a:off x="640080" y="2944368"/>
-            <a:ext cx="10881360" cy="566928"/>
+            <a:off x="640080" y="3264408"/>
+            <a:ext cx="10881360" cy="713232"/>
           </a:xfrm>
           <a:prstGeom prst="roundRect">
             <a:avLst>
-              <a:gd name="adj" fmla="val 11290"/>
+              <a:gd name="adj" fmla="val 8974"/>
             </a:avLst>
           </a:prstGeom>
           <a:solidFill>
@@ -5231,8 +5231,8 @@
         </p:nvSpPr>
         <p:spPr>
           <a:xfrm>
-            <a:off x="777240" y="2944368"/>
-            <a:ext cx="1965960" cy="566928"/>
+            <a:off x="777240" y="3264408"/>
+            <a:ext cx="1965960" cy="713232"/>
           </a:xfrm>
           <a:prstGeom prst="rect">
             <a:avLst/>
@@ -5248,7 +5248,7 @@
               <a:buNone/>
             </a:pPr>
             <a:r>
-              <a:rPr lang="en-US" sz="1250" b="1" dirty="0">
+              <a:rPr lang="en-US" sz="1350" b="1" dirty="0">
                 <a:solidFill>
                   <a:srgbClr val="11253A"/>
                 </a:solidFill>
@@ -5258,7 +5258,7 @@
               </a:rPr>
               <a:t>Forma de pago</a:t>
             </a:r>
-            <a:endParaRPr lang="en-US" sz="1250" dirty="0"/>
+            <a:endParaRPr lang="en-US" sz="1350" dirty="0"/>
           </a:p>
         </p:txBody>
       </p:sp>
@@ -5270,8 +5270,8 @@
         </p:nvSpPr>
         <p:spPr>
           <a:xfrm>
-            <a:off x="2880360" y="2944368"/>
-            <a:ext cx="2148840" cy="566928"/>
+            <a:off x="2880360" y="3264408"/>
+            <a:ext cx="2148840" cy="713232"/>
           </a:xfrm>
           <a:prstGeom prst="rect">
             <a:avLst/>
@@ -5287,7 +5287,7 @@
               <a:buNone/>
             </a:pPr>
             <a:r>
-              <a:rPr lang="en-US" sz="1250" dirty="0">
+              <a:rPr lang="en-US" sz="1350" dirty="0">
                 <a:solidFill>
                   <a:srgbClr val="5C6B78"/>
                 </a:solidFill>
@@ -5297,7 +5297,7 @@
               </a:rPr>
               <a:t>De contado</a:t>
             </a:r>
-            <a:endParaRPr lang="en-US" sz="1250" dirty="0"/>
+            <a:endParaRPr lang="en-US" sz="1350" dirty="0"/>
           </a:p>
         </p:txBody>
       </p:sp>
@@ -5309,8 +5309,8 @@
         </p:nvSpPr>
         <p:spPr>
           <a:xfrm>
-            <a:off x="5029200" y="2944368"/>
-            <a:ext cx="685800" cy="566928"/>
+            <a:off x="5029200" y="3264408"/>
+            <a:ext cx="685800" cy="713232"/>
           </a:xfrm>
           <a:prstGeom prst="rect">
             <a:avLst/>
@@ -5326,7 +5326,7 @@
               <a:buNone/>
             </a:pPr>
             <a:r>
-              <a:rPr lang="en-US" sz="1250" b="1" dirty="0">
+              <a:rPr lang="en-US" sz="1350" b="1" dirty="0">
                 <a:solidFill>
                   <a:srgbClr val="B4A269"/>
                 </a:solidFill>
@@ -5336,7 +5336,7 @@
               </a:rPr>
               <a:t>3</a:t>
             </a:r>
-            <a:endParaRPr lang="en-US" sz="1250" dirty="0"/>
+            <a:endParaRPr lang="en-US" sz="1350" dirty="0"/>
           </a:p>
         </p:txBody>
       </p:sp>
@@ -5348,8 +5348,8 @@
         </p:nvSpPr>
         <p:spPr>
           <a:xfrm>
-            <a:off x="5715000" y="2944368"/>
-            <a:ext cx="2743200" cy="566928"/>
+            <a:off x="5715000" y="3264408"/>
+            <a:ext cx="2743200" cy="713232"/>
           </a:xfrm>
           <a:prstGeom prst="rect">
             <a:avLst/>
@@ -5365,7 +5365,7 @@
               <a:buNone/>
             </a:pPr>
             <a:r>
-              <a:rPr lang="en-US" sz="1250" dirty="0">
+              <a:rPr lang="en-US" sz="1350" dirty="0">
                 <a:solidFill>
                   <a:srgbClr val="5C6B78"/>
                 </a:solidFill>
@@ -5375,7 +5375,7 @@
               </a:rPr>
               <a:t>Financiamiento o crédito</a:t>
             </a:r>
-            <a:endParaRPr lang="en-US" sz="1250" dirty="0"/>
+            <a:endParaRPr lang="en-US" sz="1350" dirty="0"/>
           </a:p>
         </p:txBody>
       </p:sp>
@@ -5387,8 +5387,8 @@
         </p:nvSpPr>
         <p:spPr>
           <a:xfrm>
-            <a:off x="8458200" y="2944368"/>
-            <a:ext cx="685800" cy="566928"/>
+            <a:off x="8458200" y="3264408"/>
+            <a:ext cx="685800" cy="713232"/>
           </a:xfrm>
           <a:prstGeom prst="rect">
             <a:avLst/>
@@ -5404,7 +5404,7 @@
               <a:buNone/>
             </a:pPr>
             <a:r>
-              <a:rPr lang="en-US" sz="1250" b="1" dirty="0">
+              <a:rPr lang="en-US" sz="1350" b="1" dirty="0">
                 <a:solidFill>
                   <a:srgbClr val="B4A269"/>
                 </a:solidFill>
@@ -5414,7 +5414,7 @@
               </a:rPr>
               <a:t>2</a:t>
             </a:r>
-            <a:endParaRPr lang="en-US" sz="1250" dirty="0"/>
+            <a:endParaRPr lang="en-US" sz="1350" dirty="0"/>
           </a:p>
         </p:txBody>
       </p:sp>
@@ -5426,8 +5426,8 @@
         </p:nvSpPr>
         <p:spPr>
           <a:xfrm>
-            <a:off x="9144000" y="2944368"/>
-            <a:ext cx="1828800" cy="566928"/>
+            <a:off x="9144000" y="3264408"/>
+            <a:ext cx="1828800" cy="713232"/>
           </a:xfrm>
           <a:prstGeom prst="rect">
             <a:avLst/>
@@ -5443,7 +5443,7 @@
               <a:buNone/>
             </a:pPr>
             <a:r>
-              <a:rPr lang="en-US" sz="1250" dirty="0">
+              <a:rPr lang="en-US" sz="1350" dirty="0">
                 <a:solidFill>
                   <a:srgbClr val="5C6B78"/>
                 </a:solidFill>
@@ -5453,7 +5453,7 @@
               </a:rPr>
               <a:t>Aún no sé</a:t>
             </a:r>
-            <a:endParaRPr lang="en-US" sz="1250" dirty="0"/>
+            <a:endParaRPr lang="en-US" sz="1350" dirty="0"/>
           </a:p>
         </p:txBody>
       </p:sp>
@@ -5465,8 +5465,8 @@
         </p:nvSpPr>
         <p:spPr>
           <a:xfrm>
-            <a:off x="10972800" y="2944368"/>
-            <a:ext cx="685800" cy="566928"/>
+            <a:off x="10972800" y="3264408"/>
+            <a:ext cx="685800" cy="713232"/>
           </a:xfrm>
           <a:prstGeom prst="rect">
             <a:avLst/>
@@ -5482,7 +5482,7 @@
               <a:buNone/>
             </a:pPr>
             <a:r>
-              <a:rPr lang="en-US" sz="1250" b="1" dirty="0">
+              <a:rPr lang="en-US" sz="1350" b="1" dirty="0">
                 <a:solidFill>
                   <a:srgbClr val="B4A269"/>
                 </a:solidFill>
@@ -5492,7 +5492,7 @@
               </a:rPr>
               <a:t>1</a:t>
             </a:r>
-            <a:endParaRPr lang="en-US" sz="1250" dirty="0"/>
+            <a:endParaRPr lang="en-US" sz="1350" dirty="0"/>
           </a:p>
         </p:txBody>
       </p:sp>
@@ -5504,12 +5504,12 @@
         </p:nvSpPr>
         <p:spPr>
           <a:xfrm>
-            <a:off x="640080" y="3703320"/>
-            <a:ext cx="5257800" cy="1691640"/>
+            <a:off x="640080" y="4160520"/>
+            <a:ext cx="5257800" cy="2057400"/>
           </a:xfrm>
           <a:prstGeom prst="roundRect">
             <a:avLst>
-              <a:gd name="adj" fmla="val 4865"/>
+              <a:gd name="adj" fmla="val 4000"/>
             </a:avLst>
           </a:prstGeom>
           <a:solidFill>
@@ -5538,7 +5538,7 @@
         </p:nvSpPr>
         <p:spPr>
           <a:xfrm>
-            <a:off x="960120" y="3913632"/>
+            <a:off x="960120" y="4407408"/>
             <a:ext cx="4617720" cy="274320"/>
           </a:xfrm>
           <a:prstGeom prst="rect">
@@ -5577,8 +5577,8 @@
         </p:nvSpPr>
         <p:spPr>
           <a:xfrm>
-            <a:off x="960120" y="4251960"/>
-            <a:ext cx="4617720" cy="960120"/>
+            <a:off x="960120" y="4800600"/>
+            <a:ext cx="4617720" cy="1280160"/>
           </a:xfrm>
           <a:prstGeom prst="rect">
             <a:avLst/>
@@ -5592,13 +5592,13 @@
           <a:p>
             <a:pPr marL="342900" indent="-342900">
               <a:spcAft>
-                <a:spcPts val="600"/>
+                <a:spcPts val="700"/>
               </a:spcAft>
               <a:buSzPct val="100000"/>
               <a:buChar char="•"/>
             </a:pPr>
             <a:r>
-              <a:rPr lang="en-US" sz="1250" dirty="0">
+              <a:rPr lang="en-US" sz="1350" dirty="0">
                 <a:solidFill>
                   <a:srgbClr val="FFFFFF"/>
                 </a:solidFill>
@@ -5608,18 +5608,18 @@
               </a:rPr>
               <a:t>Compra este mes y no dijo "aún no sé" cómo paga.</a:t>
             </a:r>
-            <a:endParaRPr lang="en-US" sz="1250" dirty="0"/>
+            <a:endParaRPr lang="en-US" sz="1350" dirty="0"/>
           </a:p>
           <a:p>
             <a:pPr marL="342900" indent="-342900">
               <a:spcAft>
-                <a:spcPts val="600"/>
+                <a:spcPts val="700"/>
               </a:spcAft>
               <a:buSzPct val="100000"/>
               <a:buChar char="•"/>
             </a:pPr>
             <a:r>
-              <a:rPr lang="en-US" sz="1250" dirty="0">
+              <a:rPr lang="en-US" sz="1350" dirty="0">
                 <a:solidFill>
                   <a:srgbClr val="FFFFFF"/>
                 </a:solidFill>
@@ -5629,7 +5629,7 @@
               </a:rPr>
               <a:t>O suma 6 o más puntos, contando +1 si es inversionista de contado.</a:t>
             </a:r>
-            <a:endParaRPr lang="en-US" sz="1250" dirty="0"/>
+            <a:endParaRPr lang="en-US" sz="1350" dirty="0"/>
           </a:p>
         </p:txBody>
       </p:sp>
@@ -5641,12 +5641,12 @@
         </p:nvSpPr>
         <p:spPr>
           <a:xfrm>
-            <a:off x="6263640" y="3703320"/>
-            <a:ext cx="5257800" cy="1691640"/>
+            <a:off x="6263640" y="4160520"/>
+            <a:ext cx="5257800" cy="2057400"/>
           </a:xfrm>
           <a:prstGeom prst="roundRect">
             <a:avLst>
-              <a:gd name="adj" fmla="val 4865"/>
+              <a:gd name="adj" fmla="val 4000"/>
             </a:avLst>
           </a:prstGeom>
           <a:solidFill>
@@ -5675,7 +5675,7 @@
         </p:nvSpPr>
         <p:spPr>
           <a:xfrm>
-            <a:off x="6583680" y="3913632"/>
+            <a:off x="6583680" y="4407408"/>
             <a:ext cx="4617720" cy="274320"/>
           </a:xfrm>
           <a:prstGeom prst="rect">
@@ -5714,24 +5714,24 @@
         </p:nvSpPr>
         <p:spPr>
           <a:xfrm>
-            <a:off x="6583680" y="4251960"/>
-            <a:ext cx="4617720" cy="960120"/>
-          </a:xfrm>
-          <a:prstGeom prst="rect">
-            <a:avLst/>
-          </a:prstGeom>
-          <a:noFill/>
-          <a:ln/>
-        </p:spPr>
-        <p:txBody>
-          <a:bodyPr wrap="square" lIns="0" tIns="0" rIns="0" bIns="0" rtlCol="0" anchor="ctr"/>
-          <a:lstStyle/>
-          <a:p>
-            <a:pPr indent="0" marL="0">
-              <a:buNone/>
-            </a:pPr>
-            <a:r>
-              <a:rPr lang="en-US" sz="1250" dirty="0">
+            <a:off x="6583680" y="4800600"/>
+            <a:ext cx="4617720" cy="1280160"/>
+          </a:xfrm>
+          <a:prstGeom prst="rect">
+            <a:avLst/>
+          </a:prstGeom>
+          <a:noFill/>
+          <a:ln/>
+        </p:spPr>
+        <p:txBody>
+          <a:bodyPr wrap="square" lIns="0" tIns="0" rIns="0" bIns="0" rtlCol="0" anchor="ctr"/>
+          <a:lstStyle/>
+          <a:p>
+            <a:pPr indent="0" marL="0">
+              <a:buNone/>
+            </a:pPr>
+            <a:r>
+              <a:rPr lang="en-US" sz="1350" dirty="0">
                 <a:solidFill>
                   <a:srgbClr val="11253A"/>
                 </a:solidFill>
@@ -5741,7 +5741,7 @@
               </a:rPr>
               <a:t>Quien dice "solo cotizando" queda frío siempre, aunque pague de contado. Sin esa regla, el asesor recibiría avisos de gente que apenas está viendo.</a:t>
             </a:r>
-            <a:endParaRPr lang="en-US" sz="1250" dirty="0"/>
+            <a:endParaRPr lang="en-US" sz="1350" dirty="0"/>
           </a:p>
         </p:txBody>
       </p:sp>
@@ -5863,7 +5863,7 @@
         </p:nvSpPr>
         <p:spPr>
           <a:xfrm>
-            <a:off x="640080" y="2148840"/>
+            <a:off x="640080" y="2377440"/>
             <a:ext cx="402336" cy="402336"/>
           </a:xfrm>
           <a:prstGeom prst="ellipse">
@@ -5883,7 +5883,7 @@
         </p:nvSpPr>
         <p:spPr>
           <a:xfrm>
-            <a:off x="640080" y="2148840"/>
+            <a:off x="640080" y="2377440"/>
             <a:ext cx="402336" cy="402336"/>
           </a:xfrm>
           <a:prstGeom prst="rect">
@@ -5922,7 +5922,7 @@
         </p:nvSpPr>
         <p:spPr>
           <a:xfrm>
-            <a:off x="1225296" y="2112264"/>
+            <a:off x="1225296" y="2340864"/>
             <a:ext cx="5120640" cy="292608"/>
           </a:xfrm>
           <a:prstGeom prst="rect">
@@ -5961,24 +5961,24 @@
         </p:nvSpPr>
         <p:spPr>
           <a:xfrm>
-            <a:off x="1225296" y="2423160"/>
-            <a:ext cx="5120640" cy="640080"/>
-          </a:xfrm>
-          <a:prstGeom prst="rect">
-            <a:avLst/>
-          </a:prstGeom>
-          <a:noFill/>
-          <a:ln/>
-        </p:spPr>
-        <p:txBody>
-          <a:bodyPr wrap="square" lIns="0" tIns="0" rIns="0" bIns="0" rtlCol="0" anchor="ctr"/>
-          <a:lstStyle/>
-          <a:p>
-            <a:pPr indent="0" marL="0">
-              <a:buNone/>
-            </a:pPr>
-            <a:r>
-              <a:rPr lang="en-US" sz="1250" dirty="0">
+            <a:off x="1225296" y="2688336"/>
+            <a:ext cx="5120640" cy="868680"/>
+          </a:xfrm>
+          <a:prstGeom prst="rect">
+            <a:avLst/>
+          </a:prstGeom>
+          <a:noFill/>
+          <a:ln/>
+        </p:spPr>
+        <p:txBody>
+          <a:bodyPr wrap="square" lIns="0" tIns="0" rIns="0" bIns="0" rtlCol="0" anchor="ctr"/>
+          <a:lstStyle/>
+          <a:p>
+            <a:pPr indent="0" marL="0">
+              <a:buNone/>
+            </a:pPr>
+            <a:r>
+              <a:rPr lang="en-US" sz="1350" dirty="0">
                 <a:solidFill>
                   <a:srgbClr val="C3CED8"/>
                 </a:solidFill>
@@ -5988,7 +5988,7 @@
               </a:rPr>
               <a:t>En cuanto el prospecto termina de contestar las tres preguntas.</a:t>
             </a:r>
-            <a:endParaRPr lang="en-US" sz="1250" dirty="0"/>
+            <a:endParaRPr lang="en-US" sz="1350" dirty="0"/>
           </a:p>
         </p:txBody>
       </p:sp>
@@ -6000,7 +6000,7 @@
         </p:nvSpPr>
         <p:spPr>
           <a:xfrm>
-            <a:off x="640080" y="3291840"/>
+            <a:off x="640080" y="3703320"/>
             <a:ext cx="402336" cy="402336"/>
           </a:xfrm>
           <a:prstGeom prst="ellipse">
@@ -6020,7 +6020,7 @@
         </p:nvSpPr>
         <p:spPr>
           <a:xfrm>
-            <a:off x="640080" y="3291840"/>
+            <a:off x="640080" y="3703320"/>
             <a:ext cx="402336" cy="402336"/>
           </a:xfrm>
           <a:prstGeom prst="rect">
@@ -6059,7 +6059,7 @@
         </p:nvSpPr>
         <p:spPr>
           <a:xfrm>
-            <a:off x="1225296" y="3255264"/>
+            <a:off x="1225296" y="3666744"/>
             <a:ext cx="5120640" cy="292608"/>
           </a:xfrm>
           <a:prstGeom prst="rect">
@@ -6098,24 +6098,24 @@
         </p:nvSpPr>
         <p:spPr>
           <a:xfrm>
-            <a:off x="1225296" y="3566160"/>
-            <a:ext cx="5120640" cy="640080"/>
-          </a:xfrm>
-          <a:prstGeom prst="rect">
-            <a:avLst/>
-          </a:prstGeom>
-          <a:noFill/>
-          <a:ln/>
-        </p:spPr>
-        <p:txBody>
-          <a:bodyPr wrap="square" lIns="0" tIns="0" rIns="0" bIns="0" rtlCol="0" anchor="ctr"/>
-          <a:lstStyle/>
-          <a:p>
-            <a:pPr indent="0" marL="0">
-              <a:buNone/>
-            </a:pPr>
-            <a:r>
-              <a:rPr lang="en-US" sz="1250" dirty="0">
+            <a:off x="1225296" y="4014216"/>
+            <a:ext cx="5120640" cy="868680"/>
+          </a:xfrm>
+          <a:prstGeom prst="rect">
+            <a:avLst/>
+          </a:prstGeom>
+          <a:noFill/>
+          <a:ln/>
+        </p:spPr>
+        <p:txBody>
+          <a:bodyPr wrap="square" lIns="0" tIns="0" rIns="0" bIns="0" rtlCol="0" anchor="ctr"/>
+          <a:lstStyle/>
+          <a:p>
+            <a:pPr indent="0" marL="0">
+              <a:buNone/>
+            </a:pPr>
+            <a:r>
+              <a:rPr lang="en-US" sz="1350" dirty="0">
                 <a:solidFill>
                   <a:srgbClr val="C3CED8"/>
                 </a:solidFill>
@@ -6125,7 +6125,7 @@
               </a:rPr>
               <a:t>Los tibios y fríos quedan en el panel, sin sonar el teléfono.</a:t>
             </a:r>
-            <a:endParaRPr lang="en-US" sz="1250" dirty="0"/>
+            <a:endParaRPr lang="en-US" sz="1350" dirty="0"/>
           </a:p>
         </p:txBody>
       </p:sp>
@@ -6137,7 +6137,7 @@
         </p:nvSpPr>
         <p:spPr>
           <a:xfrm>
-            <a:off x="640080" y="4434840"/>
+            <a:off x="640080" y="5029200"/>
             <a:ext cx="402336" cy="402336"/>
           </a:xfrm>
           <a:prstGeom prst="ellipse">
@@ -6157,7 +6157,7 @@
         </p:nvSpPr>
         <p:spPr>
           <a:xfrm>
-            <a:off x="640080" y="4434840"/>
+            <a:off x="640080" y="5029200"/>
             <a:ext cx="402336" cy="402336"/>
           </a:xfrm>
           <a:prstGeom prst="rect">
@@ -6196,7 +6196,7 @@
         </p:nvSpPr>
         <p:spPr>
           <a:xfrm>
-            <a:off x="1225296" y="4398264"/>
+            <a:off x="1225296" y="4992624"/>
             <a:ext cx="5120640" cy="292608"/>
           </a:xfrm>
           <a:prstGeom prst="rect">
@@ -6235,24 +6235,24 @@
         </p:nvSpPr>
         <p:spPr>
           <a:xfrm>
-            <a:off x="1225296" y="4709160"/>
-            <a:ext cx="5120640" cy="640080"/>
-          </a:xfrm>
-          <a:prstGeom prst="rect">
-            <a:avLst/>
-          </a:prstGeom>
-          <a:noFill/>
-          <a:ln/>
-        </p:spPr>
-        <p:txBody>
-          <a:bodyPr wrap="square" lIns="0" tIns="0" rIns="0" bIns="0" rtlCol="0" anchor="ctr"/>
-          <a:lstStyle/>
-          <a:p>
-            <a:pPr indent="0" marL="0">
-              <a:buNone/>
-            </a:pPr>
-            <a:r>
-              <a:rPr lang="en-US" sz="1250" dirty="0">
+            <a:off x="1225296" y="5340096"/>
+            <a:ext cx="5120640" cy="868680"/>
+          </a:xfrm>
+          <a:prstGeom prst="rect">
+            <a:avLst/>
+          </a:prstGeom>
+          <a:noFill/>
+          <a:ln/>
+        </p:spPr>
+        <p:txBody>
+          <a:bodyPr wrap="square" lIns="0" tIns="0" rIns="0" bIns="0" rtlCol="0" anchor="ctr"/>
+          <a:lstStyle/>
+          <a:p>
+            <a:pPr indent="0" marL="0">
+              <a:buNone/>
+            </a:pPr>
+            <a:r>
+              <a:rPr lang="en-US" sz="1350" dirty="0">
                 <a:solidFill>
                   <a:srgbClr val="C3CED8"/>
                 </a:solidFill>
@@ -6262,7 +6262,7 @@
               </a:rPr>
               <a:t>Nombre, teléfono, plazo, forma de pago y para qué lo quiere.</a:t>
             </a:r>
-            <a:endParaRPr lang="en-US" sz="1250" dirty="0"/>
+            <a:endParaRPr lang="en-US" sz="1350" dirty="0"/>
           </a:p>
         </p:txBody>
       </p:sp>
@@ -6274,12 +6274,12 @@
         </p:nvSpPr>
         <p:spPr>
           <a:xfrm>
-            <a:off x="6949440" y="1417320"/>
-            <a:ext cx="4480560" cy="3977640"/>
+            <a:off x="6949440" y="1600200"/>
+            <a:ext cx="4480560" cy="4206240"/>
           </a:xfrm>
           <a:prstGeom prst="roundRect">
             <a:avLst>
-              <a:gd name="adj" fmla="val 3678"/>
+              <a:gd name="adj" fmla="val 3478"/>
             </a:avLst>
           </a:prstGeom>
           <a:solidFill>
@@ -6303,7 +6303,7 @@
         </p:nvSpPr>
         <p:spPr>
           <a:xfrm>
-            <a:off x="7269480" y="1691640"/>
+            <a:off x="7269480" y="1874520"/>
             <a:ext cx="3840480" cy="384048"/>
           </a:xfrm>
           <a:prstGeom prst="rect">
@@ -6342,7 +6342,7 @@
         </p:nvSpPr>
         <p:spPr>
           <a:xfrm>
-            <a:off x="7269480" y="2212848"/>
+            <a:off x="7269480" y="2514600"/>
             <a:ext cx="1371600" cy="329184"/>
           </a:xfrm>
           <a:prstGeom prst="rect">
@@ -6381,7 +6381,7 @@
         </p:nvSpPr>
         <p:spPr>
           <a:xfrm>
-            <a:off x="8641080" y="2212848"/>
+            <a:off x="8641080" y="2514600"/>
             <a:ext cx="2468880" cy="329184"/>
           </a:xfrm>
           <a:prstGeom prst="rect">
@@ -6420,7 +6420,7 @@
         </p:nvSpPr>
         <p:spPr>
           <a:xfrm>
-            <a:off x="7269480" y="2615184"/>
+            <a:off x="7269480" y="2971800"/>
             <a:ext cx="1371600" cy="329184"/>
           </a:xfrm>
           <a:prstGeom prst="rect">
@@ -6459,7 +6459,7 @@
         </p:nvSpPr>
         <p:spPr>
           <a:xfrm>
-            <a:off x="8641080" y="2615184"/>
+            <a:off x="8641080" y="2971800"/>
             <a:ext cx="2468880" cy="329184"/>
           </a:xfrm>
           <a:prstGeom prst="rect">
@@ -6498,7 +6498,7 @@
         </p:nvSpPr>
         <p:spPr>
           <a:xfrm>
-            <a:off x="7269480" y="3017520"/>
+            <a:off x="7269480" y="3429000"/>
             <a:ext cx="1371600" cy="329184"/>
           </a:xfrm>
           <a:prstGeom prst="rect">
@@ -6537,7 +6537,7 @@
         </p:nvSpPr>
         <p:spPr>
           <a:xfrm>
-            <a:off x="8641080" y="3017520"/>
+            <a:off x="8641080" y="3429000"/>
             <a:ext cx="2468880" cy="329184"/>
           </a:xfrm>
           <a:prstGeom prst="rect">
@@ -6576,7 +6576,7 @@
         </p:nvSpPr>
         <p:spPr>
           <a:xfrm>
-            <a:off x="7269480" y="3419856"/>
+            <a:off x="7269480" y="3886200"/>
             <a:ext cx="1371600" cy="329184"/>
           </a:xfrm>
           <a:prstGeom prst="rect">
@@ -6615,7 +6615,7 @@
         </p:nvSpPr>
         <p:spPr>
           <a:xfrm>
-            <a:off x="8641080" y="3419856"/>
+            <a:off x="8641080" y="3886200"/>
             <a:ext cx="2468880" cy="329184"/>
           </a:xfrm>
           <a:prstGeom prst="rect">
@@ -6654,7 +6654,7 @@
         </p:nvSpPr>
         <p:spPr>
           <a:xfrm>
-            <a:off x="7269480" y="3822192"/>
+            <a:off x="7269480" y="4343400"/>
             <a:ext cx="1371600" cy="329184"/>
           </a:xfrm>
           <a:prstGeom prst="rect">
@@ -6693,7 +6693,7 @@
         </p:nvSpPr>
         <p:spPr>
           <a:xfrm>
-            <a:off x="8641080" y="3822192"/>
+            <a:off x="8641080" y="4343400"/>
             <a:ext cx="2468880" cy="329184"/>
           </a:xfrm>
           <a:prstGeom prst="rect">
@@ -6732,7 +6732,7 @@
         </p:nvSpPr>
         <p:spPr>
           <a:xfrm>
-            <a:off x="7269480" y="4224528"/>
+            <a:off x="7269480" y="4800600"/>
             <a:ext cx="1371600" cy="329184"/>
           </a:xfrm>
           <a:prstGeom prst="rect">
@@ -6771,7 +6771,7 @@
         </p:nvSpPr>
         <p:spPr>
           <a:xfrm>
-            <a:off x="8641080" y="4224528"/>
+            <a:off x="8641080" y="4800600"/>
             <a:ext cx="2468880" cy="329184"/>
           </a:xfrm>
           <a:prstGeom prst="rect">
@@ -6810,7 +6810,7 @@
         </p:nvSpPr>
         <p:spPr>
           <a:xfrm>
-            <a:off x="7269480" y="4754880"/>
+            <a:off x="7269480" y="5230368"/>
             <a:ext cx="3840480" cy="365760"/>
           </a:xfrm>
           <a:prstGeom prst="rect">
@@ -6849,7 +6849,7 @@
         </p:nvSpPr>
         <p:spPr>
           <a:xfrm>
-            <a:off x="6949440" y="5532120"/>
+            <a:off x="6949440" y="5989320"/>
             <a:ext cx="4480560" cy="274320"/>
           </a:xfrm>
           <a:prstGeom prst="rect">
@@ -6999,11 +6999,11 @@
         <p:spPr>
           <a:xfrm>
             <a:off x="640080" y="1828800"/>
-            <a:ext cx="5257800" cy="2651760"/>
+            <a:ext cx="5257800" cy="3520440"/>
           </a:xfrm>
           <a:prstGeom prst="roundRect">
             <a:avLst>
-              <a:gd name="adj" fmla="val 3103"/>
+              <a:gd name="adj" fmla="val 2338"/>
             </a:avLst>
           </a:prstGeom>
           <a:solidFill>
@@ -7071,24 +7071,24 @@
         </p:nvSpPr>
         <p:spPr>
           <a:xfrm>
-            <a:off x="960120" y="2514600"/>
-            <a:ext cx="4617720" cy="1783080"/>
-          </a:xfrm>
-          <a:prstGeom prst="rect">
-            <a:avLst/>
-          </a:prstGeom>
-          <a:noFill/>
-          <a:ln/>
-        </p:spPr>
-        <p:txBody>
-          <a:bodyPr wrap="square" lIns="0" tIns="0" rIns="0" bIns="0" rtlCol="0" anchor="ctr"/>
-          <a:lstStyle/>
-          <a:p>
-            <a:pPr indent="0" marL="0">
-              <a:buNone/>
-            </a:pPr>
-            <a:r>
-              <a:rPr lang="en-US" sz="1250" dirty="0">
+            <a:off x="960120" y="2560320"/>
+            <a:ext cx="4617720" cy="2606040"/>
+          </a:xfrm>
+          <a:prstGeom prst="rect">
+            <a:avLst/>
+          </a:prstGeom>
+          <a:noFill/>
+          <a:ln/>
+        </p:spPr>
+        <p:txBody>
+          <a:bodyPr wrap="square" lIns="0" tIns="0" rIns="0" bIns="0" rtlCol="0" anchor="ctr"/>
+          <a:lstStyle/>
+          <a:p>
+            <a:pPr indent="0" marL="0">
+              <a:buNone/>
+            </a:pPr>
+            <a:r>
+              <a:rPr lang="en-US" sz="1350" dirty="0">
                 <a:solidFill>
                   <a:srgbClr val="5C6B78"/>
                 </a:solidFill>
@@ -7098,20 +7098,20 @@
               </a:rPr>
               <a:t>Pasó de verdad: un cliente dio ciudad, pago, plazo, nombre y teléfono. El bot le dijo que un asesor lo contactaría — y no quedó registrado en ningún lado.</a:t>
             </a:r>
-            <a:endParaRPr lang="en-US" sz="1250" dirty="0"/>
-          </a:p>
-          <a:p>
-            <a:pPr indent="0" marL="0">
-              <a:buNone/>
-            </a:pPr>
-            <a:endParaRPr lang="en-US" sz="1250" dirty="0"/>
-          </a:p>
-          <a:p>
-            <a:pPr indent="0" marL="0">
-              <a:buNone/>
-            </a:pPr>
-            <a:r>
-              <a:rPr lang="en-US" sz="1250" dirty="0">
+            <a:endParaRPr lang="en-US" sz="1350" dirty="0"/>
+          </a:p>
+          <a:p>
+            <a:pPr indent="0" marL="0">
+              <a:buNone/>
+            </a:pPr>
+            <a:endParaRPr lang="en-US" sz="1350" dirty="0"/>
+          </a:p>
+          <a:p>
+            <a:pPr indent="0" marL="0">
+              <a:buNone/>
+            </a:pPr>
+            <a:r>
+              <a:rPr lang="en-US" sz="1350" dirty="0">
                 <a:solidFill>
                   <a:srgbClr val="5C6B78"/>
                 </a:solidFill>
@@ -7121,7 +7121,7 @@
               </a:rPr>
               <a:t>Es el peor fallo posible, porque por fuera todo se ve bien y nadie tiene motivo para ir a revisar.</a:t>
             </a:r>
-            <a:endParaRPr lang="en-US" sz="1250" dirty="0"/>
+            <a:endParaRPr lang="en-US" sz="1350" dirty="0"/>
           </a:p>
         </p:txBody>
       </p:sp>
@@ -7134,11 +7134,11 @@
         <p:spPr>
           <a:xfrm>
             <a:off x="6263640" y="1828800"/>
-            <a:ext cx="5257800" cy="2651760"/>
+            <a:ext cx="5257800" cy="3520440"/>
           </a:xfrm>
           <a:prstGeom prst="roundRect">
             <a:avLst>
-              <a:gd name="adj" fmla="val 3103"/>
+              <a:gd name="adj" fmla="val 2338"/>
             </a:avLst>
           </a:prstGeom>
           <a:solidFill>
@@ -7206,24 +7206,24 @@
         </p:nvSpPr>
         <p:spPr>
           <a:xfrm>
-            <a:off x="6583680" y="2514600"/>
-            <a:ext cx="4617720" cy="1783080"/>
-          </a:xfrm>
-          <a:prstGeom prst="rect">
-            <a:avLst/>
-          </a:prstGeom>
-          <a:noFill/>
-          <a:ln/>
-        </p:spPr>
-        <p:txBody>
-          <a:bodyPr wrap="square" lIns="0" tIns="0" rIns="0" bIns="0" rtlCol="0" anchor="ctr"/>
-          <a:lstStyle/>
-          <a:p>
-            <a:pPr indent="0" marL="0">
-              <a:buNone/>
-            </a:pPr>
-            <a:r>
-              <a:rPr lang="en-US" sz="1250" dirty="0">
+            <a:off x="6583680" y="2560320"/>
+            <a:ext cx="4617720" cy="2606040"/>
+          </a:xfrm>
+          <a:prstGeom prst="rect">
+            <a:avLst/>
+          </a:prstGeom>
+          <a:noFill/>
+          <a:ln/>
+        </p:spPr>
+        <p:txBody>
+          <a:bodyPr wrap="square" lIns="0" tIns="0" rIns="0" bIns="0" rtlCol="0" anchor="ctr"/>
+          <a:lstStyle/>
+          <a:p>
+            <a:pPr indent="0" marL="0">
+              <a:buNone/>
+            </a:pPr>
+            <a:r>
+              <a:rPr lang="en-US" sz="1350" dirty="0">
                 <a:solidFill>
                   <a:srgbClr val="11253A"/>
                 </a:solidFill>
@@ -7233,20 +7233,20 @@
               </a:rPr>
               <a:t>Ahora el sistema vigila cada respuesta. Si el bot promete contacto y no registró a nadie, el prospecto se levanta solo — con la conversación completa guardada — y el asesor recibe aviso.</a:t>
             </a:r>
-            <a:endParaRPr lang="en-US" sz="1250" dirty="0"/>
-          </a:p>
-          <a:p>
-            <a:pPr indent="0" marL="0">
-              <a:buNone/>
-            </a:pPr>
-            <a:endParaRPr lang="en-US" sz="1250" dirty="0"/>
-          </a:p>
-          <a:p>
-            <a:pPr indent="0" marL="0">
-              <a:buNone/>
-            </a:pPr>
-            <a:r>
-              <a:rPr lang="en-US" sz="1250" dirty="0">
+            <a:endParaRPr lang="en-US" sz="1350" dirty="0"/>
+          </a:p>
+          <a:p>
+            <a:pPr indent="0" marL="0">
+              <a:buNone/>
+            </a:pPr>
+            <a:endParaRPr lang="en-US" sz="1350" dirty="0"/>
+          </a:p>
+          <a:p>
+            <a:pPr indent="0" marL="0">
+              <a:buNone/>
+            </a:pPr>
+            <a:r>
+              <a:rPr lang="en-US" sz="1350" dirty="0">
                 <a:solidFill>
                   <a:srgbClr val="11253A"/>
                 </a:solidFill>
@@ -7256,7 +7256,7 @@
               </a:rPr>
               <a:t>Y cuando el teléfono llega después, avisa otra vez: ese es el momento en que por fin se le puede llamar.</a:t>
             </a:r>
-            <a:endParaRPr lang="en-US" sz="1250" dirty="0"/>
+            <a:endParaRPr lang="en-US" sz="1350" dirty="0"/>
           </a:p>
         </p:txBody>
       </p:sp>
@@ -7268,7 +7268,7 @@
         </p:nvSpPr>
         <p:spPr>
           <a:xfrm>
-            <a:off x="640080" y="4754880"/>
+            <a:off x="640080" y="5852160"/>
             <a:ext cx="10881360" cy="457200"/>
           </a:xfrm>
           <a:prstGeom prst="rect">
@@ -7417,7 +7417,7 @@
         </p:nvSpPr>
         <p:spPr>
           <a:xfrm>
-            <a:off x="640080" y="1856232"/>
+            <a:off x="640080" y="1901952"/>
             <a:ext cx="365760" cy="365760"/>
           </a:xfrm>
           <a:prstGeom prst="ellipse">
@@ -7437,7 +7437,7 @@
         </p:nvSpPr>
         <p:spPr>
           <a:xfrm>
-            <a:off x="640080" y="1856232"/>
+            <a:off x="640080" y="1901952"/>
             <a:ext cx="365760" cy="365760"/>
           </a:xfrm>
           <a:prstGeom prst="rect">
@@ -7476,7 +7476,7 @@
         </p:nvSpPr>
         <p:spPr>
           <a:xfrm>
-            <a:off x="1207008" y="1700784"/>
+            <a:off x="1207008" y="1746504"/>
             <a:ext cx="3611880" cy="749808"/>
           </a:xfrm>
           <a:prstGeom prst="rect">
@@ -7515,7 +7515,7 @@
         </p:nvSpPr>
         <p:spPr>
           <a:xfrm>
-            <a:off x="4983480" y="1783080"/>
+            <a:off x="4983480" y="1828800"/>
             <a:ext cx="6537960" cy="822960"/>
           </a:xfrm>
           <a:prstGeom prst="rect">
@@ -7554,7 +7554,7 @@
         </p:nvSpPr>
         <p:spPr>
           <a:xfrm>
-            <a:off x="640080" y="2816352"/>
+            <a:off x="640080" y="2980944"/>
             <a:ext cx="365760" cy="365760"/>
           </a:xfrm>
           <a:prstGeom prst="ellipse">
@@ -7574,7 +7574,7 @@
         </p:nvSpPr>
         <p:spPr>
           <a:xfrm>
-            <a:off x="640080" y="2816352"/>
+            <a:off x="640080" y="2980944"/>
             <a:ext cx="365760" cy="365760"/>
           </a:xfrm>
           <a:prstGeom prst="rect">
@@ -7613,7 +7613,7 @@
         </p:nvSpPr>
         <p:spPr>
           <a:xfrm>
-            <a:off x="1207008" y="2660904"/>
+            <a:off x="1207008" y="2825496"/>
             <a:ext cx="3611880" cy="749808"/>
           </a:xfrm>
           <a:prstGeom prst="rect">
@@ -7652,7 +7652,7 @@
         </p:nvSpPr>
         <p:spPr>
           <a:xfrm>
-            <a:off x="4983480" y="2743200"/>
+            <a:off x="4983480" y="2907792"/>
             <a:ext cx="6537960" cy="822960"/>
           </a:xfrm>
           <a:prstGeom prst="rect">
@@ -7691,7 +7691,7 @@
         </p:nvSpPr>
         <p:spPr>
           <a:xfrm>
-            <a:off x="640080" y="3776472"/>
+            <a:off x="640080" y="4059936"/>
             <a:ext cx="365760" cy="365760"/>
           </a:xfrm>
           <a:prstGeom prst="ellipse">
@@ -7711,7 +7711,7 @@
         </p:nvSpPr>
         <p:spPr>
           <a:xfrm>
-            <a:off x="640080" y="3776472"/>
+            <a:off x="640080" y="4059936"/>
             <a:ext cx="365760" cy="365760"/>
           </a:xfrm>
           <a:prstGeom prst="rect">
@@ -7750,7 +7750,7 @@
         </p:nvSpPr>
         <p:spPr>
           <a:xfrm>
-            <a:off x="1207008" y="3621024"/>
+            <a:off x="1207008" y="3904488"/>
             <a:ext cx="3611880" cy="749808"/>
           </a:xfrm>
           <a:prstGeom prst="rect">
@@ -7789,7 +7789,7 @@
         </p:nvSpPr>
         <p:spPr>
           <a:xfrm>
-            <a:off x="4983480" y="3703320"/>
+            <a:off x="4983480" y="3986784"/>
             <a:ext cx="6537960" cy="822960"/>
           </a:xfrm>
           <a:prstGeom prst="rect">
@@ -7828,7 +7828,7 @@
         </p:nvSpPr>
         <p:spPr>
           <a:xfrm>
-            <a:off x="640080" y="4736592"/>
+            <a:off x="640080" y="5138928"/>
             <a:ext cx="365760" cy="365760"/>
           </a:xfrm>
           <a:prstGeom prst="ellipse">
@@ -7848,7 +7848,7 @@
         </p:nvSpPr>
         <p:spPr>
           <a:xfrm>
-            <a:off x="640080" y="4736592"/>
+            <a:off x="640080" y="5138928"/>
             <a:ext cx="365760" cy="365760"/>
           </a:xfrm>
           <a:prstGeom prst="rect">
@@ -7887,7 +7887,7 @@
         </p:nvSpPr>
         <p:spPr>
           <a:xfrm>
-            <a:off x="1207008" y="4581144"/>
+            <a:off x="1207008" y="4983480"/>
             <a:ext cx="3611880" cy="749808"/>
           </a:xfrm>
           <a:prstGeom prst="rect">
@@ -7926,7 +7926,7 @@
         </p:nvSpPr>
         <p:spPr>
           <a:xfrm>
-            <a:off x="4983480" y="4663440"/>
+            <a:off x="4983480" y="5065776"/>
             <a:ext cx="6537960" cy="822960"/>
           </a:xfrm>
           <a:prstGeom prst="rect">
@@ -7965,7 +7965,7 @@
         </p:nvSpPr>
         <p:spPr>
           <a:xfrm>
-            <a:off x="640080" y="5806440"/>
+            <a:off x="640080" y="6126480"/>
             <a:ext cx="10881360" cy="457200"/>
           </a:xfrm>
           <a:prstGeom prst="rect">
@@ -8074,8 +8074,8 @@
         </p:nvSpPr>
         <p:spPr>
           <a:xfrm>
-            <a:off x="640080" y="1371600"/>
-            <a:ext cx="7315200" cy="731520"/>
+            <a:off x="640080" y="1234440"/>
+            <a:ext cx="7315200" cy="777240"/>
           </a:xfrm>
           <a:prstGeom prst="rect">
             <a:avLst/>
@@ -8211,7 +8211,7 @@
         </p:nvSpPr>
         <p:spPr>
           <a:xfrm>
-            <a:off x="640080" y="3346704"/>
+            <a:off x="640080" y="3465576"/>
             <a:ext cx="292608" cy="292608"/>
           </a:xfrm>
           <a:prstGeom prst="ellipse">
@@ -8231,7 +8231,7 @@
         </p:nvSpPr>
         <p:spPr>
           <a:xfrm>
-            <a:off x="1143000" y="3291840"/>
+            <a:off x="1143000" y="3410712"/>
             <a:ext cx="3931920" cy="411480"/>
           </a:xfrm>
           <a:prstGeom prst="rect">
@@ -8270,7 +8270,7 @@
         </p:nvSpPr>
         <p:spPr>
           <a:xfrm>
-            <a:off x="5166360" y="3291840"/>
+            <a:off x="5166360" y="3410712"/>
             <a:ext cx="6400800" cy="411480"/>
           </a:xfrm>
           <a:prstGeom prst="rect">
@@ -8309,7 +8309,7 @@
         </p:nvSpPr>
         <p:spPr>
           <a:xfrm>
-            <a:off x="640080" y="4123944"/>
+            <a:off x="640080" y="4361688"/>
             <a:ext cx="292608" cy="292608"/>
           </a:xfrm>
           <a:prstGeom prst="ellipse">
@@ -8329,7 +8329,7 @@
         </p:nvSpPr>
         <p:spPr>
           <a:xfrm>
-            <a:off x="1143000" y="4069080"/>
+            <a:off x="1143000" y="4306824"/>
             <a:ext cx="3931920" cy="411480"/>
           </a:xfrm>
           <a:prstGeom prst="rect">
@@ -8368,7 +8368,7 @@
         </p:nvSpPr>
         <p:spPr>
           <a:xfrm>
-            <a:off x="5166360" y="4069080"/>
+            <a:off x="5166360" y="4306824"/>
             <a:ext cx="6400800" cy="411480"/>
           </a:xfrm>
           <a:prstGeom prst="rect">
@@ -8407,7 +8407,7 @@
         </p:nvSpPr>
         <p:spPr>
           <a:xfrm>
-            <a:off x="640080" y="4901184"/>
+            <a:off x="640080" y="5257800"/>
             <a:ext cx="292608" cy="292608"/>
           </a:xfrm>
           <a:prstGeom prst="ellipse">
@@ -8427,7 +8427,7 @@
         </p:nvSpPr>
         <p:spPr>
           <a:xfrm>
-            <a:off x="1143000" y="4846320"/>
+            <a:off x="1143000" y="5202936"/>
             <a:ext cx="3931920" cy="411480"/>
           </a:xfrm>
           <a:prstGeom prst="rect">
@@ -8466,7 +8466,7 @@
         </p:nvSpPr>
         <p:spPr>
           <a:xfrm>
-            <a:off x="5166360" y="4846320"/>
+            <a:off x="5166360" y="5202936"/>
             <a:ext cx="6400800" cy="411480"/>
           </a:xfrm>
           <a:prstGeom prst="rect">
@@ -8654,12 +8654,12 @@
         </p:nvSpPr>
         <p:spPr>
           <a:xfrm>
-            <a:off x="640080" y="1874520"/>
-            <a:ext cx="3429000" cy="2514600"/>
+            <a:off x="640080" y="1828800"/>
+            <a:ext cx="3429000" cy="3291840"/>
           </a:xfrm>
           <a:prstGeom prst="roundRect">
             <a:avLst>
-              <a:gd name="adj" fmla="val 3273"/>
+              <a:gd name="adj" fmla="val 2500"/>
             </a:avLst>
           </a:prstGeom>
           <a:solidFill>
@@ -8747,24 +8747,24 @@
         </p:nvSpPr>
         <p:spPr>
           <a:xfrm>
-            <a:off x="960120" y="2834640"/>
-            <a:ext cx="2788920" cy="548640"/>
-          </a:xfrm>
-          <a:prstGeom prst="rect">
-            <a:avLst/>
-          </a:prstGeom>
-          <a:noFill/>
-          <a:ln/>
-        </p:spPr>
-        <p:txBody>
-          <a:bodyPr wrap="square" lIns="0" tIns="0" rIns="0" bIns="0" rtlCol="0" anchor="ctr"/>
-          <a:lstStyle/>
-          <a:p>
-            <a:pPr indent="0" marL="0">
-              <a:buNone/>
-            </a:pPr>
-            <a:r>
-              <a:rPr lang="en-US" sz="1800" b="1" dirty="0">
+            <a:off x="960120" y="2926080"/>
+            <a:ext cx="2788920" cy="685800"/>
+          </a:xfrm>
+          <a:prstGeom prst="rect">
+            <a:avLst/>
+          </a:prstGeom>
+          <a:noFill/>
+          <a:ln/>
+        </p:spPr>
+        <p:txBody>
+          <a:bodyPr wrap="square" lIns="0" tIns="0" rIns="0" bIns="0" rtlCol="0" anchor="ctr"/>
+          <a:lstStyle/>
+          <a:p>
+            <a:pPr indent="0" marL="0">
+              <a:buNone/>
+            </a:pPr>
+            <a:r>
+              <a:rPr lang="en-US" sz="1900" b="1" dirty="0">
                 <a:solidFill>
                   <a:srgbClr val="11253A"/>
                 </a:solidFill>
@@ -8774,7 +8774,7 @@
               </a:rPr>
               <a:t>Escriben a cualquier hora</a:t>
             </a:r>
-            <a:endParaRPr lang="en-US" sz="1800" dirty="0"/>
+            <a:endParaRPr lang="en-US" sz="1900" dirty="0"/>
           </a:p>
         </p:txBody>
       </p:sp>
@@ -8786,24 +8786,24 @@
         </p:nvSpPr>
         <p:spPr>
           <a:xfrm>
-            <a:off x="960120" y="3383280"/>
-            <a:ext cx="2788920" cy="914400"/>
-          </a:xfrm>
-          <a:prstGeom prst="rect">
-            <a:avLst/>
-          </a:prstGeom>
-          <a:noFill/>
-          <a:ln/>
-        </p:spPr>
-        <p:txBody>
-          <a:bodyPr wrap="square" lIns="0" tIns="0" rIns="0" bIns="0" rtlCol="0" anchor="ctr"/>
-          <a:lstStyle/>
-          <a:p>
-            <a:pPr indent="0" marL="0">
-              <a:buNone/>
-            </a:pPr>
-            <a:r>
-              <a:rPr lang="en-US" sz="1250" dirty="0">
+            <a:off x="960120" y="3703320"/>
+            <a:ext cx="2788920" cy="1234440"/>
+          </a:xfrm>
+          <a:prstGeom prst="rect">
+            <a:avLst/>
+          </a:prstGeom>
+          <a:noFill/>
+          <a:ln/>
+        </p:spPr>
+        <p:txBody>
+          <a:bodyPr wrap="square" lIns="0" tIns="0" rIns="0" bIns="0" rtlCol="0" anchor="ctr"/>
+          <a:lstStyle/>
+          <a:p>
+            <a:pPr indent="0" marL="0">
+              <a:buNone/>
+            </a:pPr>
+            <a:r>
+              <a:rPr lang="en-US" sz="1350" dirty="0">
                 <a:solidFill>
                   <a:srgbClr val="5C6B78"/>
                 </a:solidFill>
@@ -8813,7 +8813,7 @@
               </a:rPr>
               <a:t>La mayoría de los mensajes llegan de noche y en fin de semana, cuando nadie está en el teléfono.</a:t>
             </a:r>
-            <a:endParaRPr lang="en-US" sz="1250" dirty="0"/>
+            <a:endParaRPr lang="en-US" sz="1350" dirty="0"/>
           </a:p>
         </p:txBody>
       </p:sp>
@@ -8825,12 +8825,12 @@
         </p:nvSpPr>
         <p:spPr>
           <a:xfrm>
-            <a:off x="4434840" y="1874520"/>
-            <a:ext cx="3429000" cy="2514600"/>
+            <a:off x="4434840" y="1828800"/>
+            <a:ext cx="3429000" cy="3291840"/>
           </a:xfrm>
           <a:prstGeom prst="roundRect">
             <a:avLst>
-              <a:gd name="adj" fmla="val 3273"/>
+              <a:gd name="adj" fmla="val 2500"/>
             </a:avLst>
           </a:prstGeom>
           <a:solidFill>
@@ -8918,24 +8918,24 @@
         </p:nvSpPr>
         <p:spPr>
           <a:xfrm>
-            <a:off x="4754880" y="2834640"/>
-            <a:ext cx="2788920" cy="548640"/>
-          </a:xfrm>
-          <a:prstGeom prst="rect">
-            <a:avLst/>
-          </a:prstGeom>
-          <a:noFill/>
-          <a:ln/>
-        </p:spPr>
-        <p:txBody>
-          <a:bodyPr wrap="square" lIns="0" tIns="0" rIns="0" bIns="0" rtlCol="0" anchor="ctr"/>
-          <a:lstStyle/>
-          <a:p>
-            <a:pPr indent="0" marL="0">
-              <a:buNone/>
-            </a:pPr>
-            <a:r>
-              <a:rPr lang="en-US" sz="1800" b="1" dirty="0">
+            <a:off x="4754880" y="2926080"/>
+            <a:ext cx="2788920" cy="685800"/>
+          </a:xfrm>
+          <a:prstGeom prst="rect">
+            <a:avLst/>
+          </a:prstGeom>
+          <a:noFill/>
+          <a:ln/>
+        </p:spPr>
+        <p:txBody>
+          <a:bodyPr wrap="square" lIns="0" tIns="0" rIns="0" bIns="0" rtlCol="0" anchor="ctr"/>
+          <a:lstStyle/>
+          <a:p>
+            <a:pPr indent="0" marL="0">
+              <a:buNone/>
+            </a:pPr>
+            <a:r>
+              <a:rPr lang="en-US" sz="1900" b="1" dirty="0">
                 <a:solidFill>
                   <a:srgbClr val="11253A"/>
                 </a:solidFill>
@@ -8945,7 +8945,7 @@
               </a:rPr>
               <a:t>El interés se enfría rápido</a:t>
             </a:r>
-            <a:endParaRPr lang="en-US" sz="1800" dirty="0"/>
+            <a:endParaRPr lang="en-US" sz="1900" dirty="0"/>
           </a:p>
         </p:txBody>
       </p:sp>
@@ -8957,24 +8957,24 @@
         </p:nvSpPr>
         <p:spPr>
           <a:xfrm>
-            <a:off x="4754880" y="3383280"/>
-            <a:ext cx="2788920" cy="914400"/>
-          </a:xfrm>
-          <a:prstGeom prst="rect">
-            <a:avLst/>
-          </a:prstGeom>
-          <a:noFill/>
-          <a:ln/>
-        </p:spPr>
-        <p:txBody>
-          <a:bodyPr wrap="square" lIns="0" tIns="0" rIns="0" bIns="0" rtlCol="0" anchor="ctr"/>
-          <a:lstStyle/>
-          <a:p>
-            <a:pPr indent="0" marL="0">
-              <a:buNone/>
-            </a:pPr>
-            <a:r>
-              <a:rPr lang="en-US" sz="1250" dirty="0">
+            <a:off x="4754880" y="3703320"/>
+            <a:ext cx="2788920" cy="1234440"/>
+          </a:xfrm>
+          <a:prstGeom prst="rect">
+            <a:avLst/>
+          </a:prstGeom>
+          <a:noFill/>
+          <a:ln/>
+        </p:spPr>
+        <p:txBody>
+          <a:bodyPr wrap="square" lIns="0" tIns="0" rIns="0" bIns="0" rtlCol="0" anchor="ctr"/>
+          <a:lstStyle/>
+          <a:p>
+            <a:pPr indent="0" marL="0">
+              <a:buNone/>
+            </a:pPr>
+            <a:r>
+              <a:rPr lang="en-US" sz="1350" dirty="0">
                 <a:solidFill>
                   <a:srgbClr val="5C6B78"/>
                 </a:solidFill>
@@ -8984,7 +8984,7 @@
               </a:rPr>
               <a:t>Quien pregunta por un terreno está preguntando en varios lados al mismo tiempo. Contesta el primero.</a:t>
             </a:r>
-            <a:endParaRPr lang="en-US" sz="1250" dirty="0"/>
+            <a:endParaRPr lang="en-US" sz="1350" dirty="0"/>
           </a:p>
         </p:txBody>
       </p:sp>
@@ -8996,12 +8996,12 @@
         </p:nvSpPr>
         <p:spPr>
           <a:xfrm>
-            <a:off x="8229600" y="1874520"/>
-            <a:ext cx="3429000" cy="2514600"/>
+            <a:off x="8229600" y="1828800"/>
+            <a:ext cx="3429000" cy="3291840"/>
           </a:xfrm>
           <a:prstGeom prst="roundRect">
             <a:avLst>
-              <a:gd name="adj" fmla="val 3273"/>
+              <a:gd name="adj" fmla="val 2500"/>
             </a:avLst>
           </a:prstGeom>
           <a:solidFill>
@@ -9089,24 +9089,24 @@
         </p:nvSpPr>
         <p:spPr>
           <a:xfrm>
-            <a:off x="8549640" y="2834640"/>
-            <a:ext cx="2788920" cy="548640"/>
-          </a:xfrm>
-          <a:prstGeom prst="rect">
-            <a:avLst/>
-          </a:prstGeom>
-          <a:noFill/>
-          <a:ln/>
-        </p:spPr>
-        <p:txBody>
-          <a:bodyPr wrap="square" lIns="0" tIns="0" rIns="0" bIns="0" rtlCol="0" anchor="ctr"/>
-          <a:lstStyle/>
-          <a:p>
-            <a:pPr indent="0" marL="0">
-              <a:buNone/>
-            </a:pPr>
-            <a:r>
-              <a:rPr lang="en-US" sz="1800" b="1" dirty="0">
+            <a:off x="8549640" y="2926080"/>
+            <a:ext cx="2788920" cy="685800"/>
+          </a:xfrm>
+          <a:prstGeom prst="rect">
+            <a:avLst/>
+          </a:prstGeom>
+          <a:noFill/>
+          <a:ln/>
+        </p:spPr>
+        <p:txBody>
+          <a:bodyPr wrap="square" lIns="0" tIns="0" rIns="0" bIns="0" rtlCol="0" anchor="ctr"/>
+          <a:lstStyle/>
+          <a:p>
+            <a:pPr indent="0" marL="0">
+              <a:buNone/>
+            </a:pPr>
+            <a:r>
+              <a:rPr lang="en-US" sz="1900" b="1" dirty="0">
                 <a:solidFill>
                   <a:srgbClr val="11253A"/>
                 </a:solidFill>
@@ -9116,7 +9116,7 @@
               </a:rPr>
               <a:t>Se pierde quién era quién</a:t>
             </a:r>
-            <a:endParaRPr lang="en-US" sz="1800" dirty="0"/>
+            <a:endParaRPr lang="en-US" sz="1900" dirty="0"/>
           </a:p>
         </p:txBody>
       </p:sp>
@@ -9128,24 +9128,24 @@
         </p:nvSpPr>
         <p:spPr>
           <a:xfrm>
-            <a:off x="8549640" y="3383280"/>
-            <a:ext cx="2788920" cy="914400"/>
-          </a:xfrm>
-          <a:prstGeom prst="rect">
-            <a:avLst/>
-          </a:prstGeom>
-          <a:noFill/>
-          <a:ln/>
-        </p:spPr>
-        <p:txBody>
-          <a:bodyPr wrap="square" lIns="0" tIns="0" rIns="0" bIns="0" rtlCol="0" anchor="ctr"/>
-          <a:lstStyle/>
-          <a:p>
-            <a:pPr indent="0" marL="0">
-              <a:buNone/>
-            </a:pPr>
-            <a:r>
-              <a:rPr lang="en-US" sz="1250" dirty="0">
+            <a:off x="8549640" y="3703320"/>
+            <a:ext cx="2788920" cy="1234440"/>
+          </a:xfrm>
+          <a:prstGeom prst="rect">
+            <a:avLst/>
+          </a:prstGeom>
+          <a:noFill/>
+          <a:ln/>
+        </p:spPr>
+        <p:txBody>
+          <a:bodyPr wrap="square" lIns="0" tIns="0" rIns="0" bIns="0" rtlCol="0" anchor="ctr"/>
+          <a:lstStyle/>
+          <a:p>
+            <a:pPr indent="0" marL="0">
+              <a:buNone/>
+            </a:pPr>
+            <a:r>
+              <a:rPr lang="en-US" sz="1350" dirty="0">
                 <a:solidFill>
                   <a:srgbClr val="5C6B78"/>
                 </a:solidFill>
@@ -9155,7 +9155,7 @@
               </a:rPr>
               <a:t>Sin un registro, a los tres días ya no se sabe cuál de todos los mensajes era el comprador serio.</a:t>
             </a:r>
-            <a:endParaRPr lang="en-US" sz="1250" dirty="0"/>
+            <a:endParaRPr lang="en-US" sz="1350" dirty="0"/>
           </a:p>
         </p:txBody>
       </p:sp>
@@ -9167,7 +9167,7 @@
         </p:nvSpPr>
         <p:spPr>
           <a:xfrm>
-            <a:off x="640080" y="4800600"/>
+            <a:off x="640080" y="5760720"/>
             <a:ext cx="10881360" cy="457200"/>
           </a:xfrm>
           <a:prstGeom prst="rect">
@@ -9316,8 +9316,8 @@
         </p:nvSpPr>
         <p:spPr>
           <a:xfrm>
-            <a:off x="640080" y="1965960"/>
-            <a:ext cx="2084832" cy="2377440"/>
+            <a:off x="640080" y="1920240"/>
+            <a:ext cx="2084832" cy="3200400"/>
           </a:xfrm>
           <a:prstGeom prst="roundRect">
             <a:avLst>
@@ -9350,7 +9350,7 @@
         </p:nvSpPr>
         <p:spPr>
           <a:xfrm>
-            <a:off x="1444752" y="2212848"/>
+            <a:off x="1444752" y="2286000"/>
             <a:ext cx="475488" cy="475488"/>
           </a:xfrm>
           <a:prstGeom prst="ellipse">
@@ -9370,7 +9370,7 @@
         </p:nvSpPr>
         <p:spPr>
           <a:xfrm>
-            <a:off x="1444752" y="2212848"/>
+            <a:off x="1444752" y="2286000"/>
             <a:ext cx="475488" cy="475488"/>
           </a:xfrm>
           <a:prstGeom prst="rect">
@@ -9409,8 +9409,8 @@
         </p:nvSpPr>
         <p:spPr>
           <a:xfrm>
-            <a:off x="640080" y="2834640"/>
-            <a:ext cx="2084832" cy="365760"/>
+            <a:off x="640080" y="2971800"/>
+            <a:ext cx="2084832" cy="411480"/>
           </a:xfrm>
           <a:prstGeom prst="rect">
             <a:avLst/>
@@ -9426,7 +9426,7 @@
               <a:buNone/>
             </a:pPr>
             <a:r>
-              <a:rPr lang="en-US" sz="1700" b="1" dirty="0">
+              <a:rPr lang="en-US" sz="1800" b="1" dirty="0">
                 <a:solidFill>
                   <a:srgbClr val="11253A"/>
                 </a:solidFill>
@@ -9436,7 +9436,7 @@
               </a:rPr>
               <a:t>Llega</a:t>
             </a:r>
-            <a:endParaRPr lang="en-US" sz="1700" dirty="0"/>
+            <a:endParaRPr lang="en-US" sz="1800" dirty="0"/>
           </a:p>
         </p:txBody>
       </p:sp>
@@ -9448,8 +9448,8 @@
         </p:nvSpPr>
         <p:spPr>
           <a:xfrm>
-            <a:off x="777240" y="3246120"/>
-            <a:ext cx="1810512" cy="960120"/>
+            <a:off x="777240" y="3520440"/>
+            <a:ext cx="1810512" cy="1371600"/>
           </a:xfrm>
           <a:prstGeom prst="rect">
             <a:avLst/>
@@ -9465,7 +9465,7 @@
               <a:buNone/>
             </a:pPr>
             <a:r>
-              <a:rPr lang="en-US" sz="1150" dirty="0">
+              <a:rPr lang="en-US" sz="1250" dirty="0">
                 <a:solidFill>
                   <a:srgbClr val="5C6B78"/>
                 </a:solidFill>
@@ -9475,14 +9475,14 @@
               </a:rPr>
               <a:t>Comenta o escribe</a:t>
             </a:r>
-            <a:endParaRPr lang="en-US" sz="1150" dirty="0"/>
+            <a:endParaRPr lang="en-US" sz="1250" dirty="0"/>
           </a:p>
           <a:p>
             <a:pPr algn="ctr" indent="0" marL="0">
               <a:buNone/>
             </a:pPr>
             <a:r>
-              <a:rPr lang="en-US" sz="1150" dirty="0">
+              <a:rPr lang="en-US" sz="1250" dirty="0">
                 <a:solidFill>
                   <a:srgbClr val="5C6B78"/>
                 </a:solidFill>
@@ -9492,14 +9492,14 @@
               </a:rPr>
               <a:t>en redes, web o</a:t>
             </a:r>
-            <a:endParaRPr lang="en-US" sz="1150" dirty="0"/>
+            <a:endParaRPr lang="en-US" sz="1250" dirty="0"/>
           </a:p>
           <a:p>
             <a:pPr algn="ctr" indent="0" marL="0">
               <a:buNone/>
             </a:pPr>
             <a:r>
-              <a:rPr lang="en-US" sz="1150" dirty="0">
+              <a:rPr lang="en-US" sz="1250" dirty="0">
                 <a:solidFill>
                   <a:srgbClr val="5C6B78"/>
                 </a:solidFill>
@@ -9509,7 +9509,7 @@
               </a:rPr>
               <a:t>WhatsApp</a:t>
             </a:r>
-            <a:endParaRPr lang="en-US" sz="1150" dirty="0"/>
+            <a:endParaRPr lang="en-US" sz="1250" dirty="0"/>
           </a:p>
         </p:txBody>
       </p:sp>
@@ -9521,7 +9521,7 @@
         </p:nvSpPr>
         <p:spPr>
           <a:xfrm>
-            <a:off x="2724912" y="2880360"/>
+            <a:off x="2724912" y="2999232"/>
             <a:ext cx="219456" cy="365760"/>
           </a:xfrm>
           <a:prstGeom prst="rect">
@@ -9560,8 +9560,8 @@
         </p:nvSpPr>
         <p:spPr>
           <a:xfrm>
-            <a:off x="2944368" y="1965960"/>
-            <a:ext cx="2084832" cy="2377440"/>
+            <a:off x="2944368" y="1920240"/>
+            <a:ext cx="2084832" cy="3200400"/>
           </a:xfrm>
           <a:prstGeom prst="roundRect">
             <a:avLst>
@@ -9594,7 +9594,7 @@
         </p:nvSpPr>
         <p:spPr>
           <a:xfrm>
-            <a:off x="3749040" y="2212848"/>
+            <a:off x="3749040" y="2286000"/>
             <a:ext cx="475488" cy="475488"/>
           </a:xfrm>
           <a:prstGeom prst="ellipse">
@@ -9614,7 +9614,7 @@
         </p:nvSpPr>
         <p:spPr>
           <a:xfrm>
-            <a:off x="3749040" y="2212848"/>
+            <a:off x="3749040" y="2286000"/>
             <a:ext cx="475488" cy="475488"/>
           </a:xfrm>
           <a:prstGeom prst="rect">
@@ -9653,8 +9653,8 @@
         </p:nvSpPr>
         <p:spPr>
           <a:xfrm>
-            <a:off x="2944368" y="2834640"/>
-            <a:ext cx="2084832" cy="365760"/>
+            <a:off x="2944368" y="2971800"/>
+            <a:ext cx="2084832" cy="411480"/>
           </a:xfrm>
           <a:prstGeom prst="rect">
             <a:avLst/>
@@ -9670,7 +9670,7 @@
               <a:buNone/>
             </a:pPr>
             <a:r>
-              <a:rPr lang="en-US" sz="1700" b="1" dirty="0">
+              <a:rPr lang="en-US" sz="1800" b="1" dirty="0">
                 <a:solidFill>
                   <a:srgbClr val="11253A"/>
                 </a:solidFill>
@@ -9680,7 +9680,7 @@
               </a:rPr>
               <a:t>Responde</a:t>
             </a:r>
-            <a:endParaRPr lang="en-US" sz="1700" dirty="0"/>
+            <a:endParaRPr lang="en-US" sz="1800" dirty="0"/>
           </a:p>
         </p:txBody>
       </p:sp>
@@ -9692,8 +9692,8 @@
         </p:nvSpPr>
         <p:spPr>
           <a:xfrm>
-            <a:off x="3081528" y="3246120"/>
-            <a:ext cx="1810512" cy="960120"/>
+            <a:off x="3081528" y="3520440"/>
+            <a:ext cx="1810512" cy="1371600"/>
           </a:xfrm>
           <a:prstGeom prst="rect">
             <a:avLst/>
@@ -9709,7 +9709,7 @@
               <a:buNone/>
             </a:pPr>
             <a:r>
-              <a:rPr lang="en-US" sz="1150" dirty="0">
+              <a:rPr lang="en-US" sz="1250" dirty="0">
                 <a:solidFill>
                   <a:srgbClr val="5C6B78"/>
                 </a:solidFill>
@@ -9719,14 +9719,14 @@
               </a:rPr>
               <a:t>El bot contesta al</a:t>
             </a:r>
-            <a:endParaRPr lang="en-US" sz="1150" dirty="0"/>
+            <a:endParaRPr lang="en-US" sz="1250" dirty="0"/>
           </a:p>
           <a:p>
             <a:pPr algn="ctr" indent="0" marL="0">
               <a:buNone/>
             </a:pPr>
             <a:r>
-              <a:rPr lang="en-US" sz="1150" dirty="0">
+              <a:rPr lang="en-US" sz="1250" dirty="0">
                 <a:solidFill>
                   <a:srgbClr val="5C6B78"/>
                 </a:solidFill>
@@ -9736,14 +9736,14 @@
               </a:rPr>
               <a:t>instante y resuelve</a:t>
             </a:r>
-            <a:endParaRPr lang="en-US" sz="1150" dirty="0"/>
+            <a:endParaRPr lang="en-US" sz="1250" dirty="0"/>
           </a:p>
           <a:p>
             <a:pPr algn="ctr" indent="0" marL="0">
               <a:buNone/>
             </a:pPr>
             <a:r>
-              <a:rPr lang="en-US" sz="1150" dirty="0">
+              <a:rPr lang="en-US" sz="1250" dirty="0">
                 <a:solidFill>
                   <a:srgbClr val="5C6B78"/>
                 </a:solidFill>
@@ -9753,7 +9753,7 @@
               </a:rPr>
               <a:t>sus dudas</a:t>
             </a:r>
-            <a:endParaRPr lang="en-US" sz="1150" dirty="0"/>
+            <a:endParaRPr lang="en-US" sz="1250" dirty="0"/>
           </a:p>
         </p:txBody>
       </p:sp>
@@ -9765,7 +9765,7 @@
         </p:nvSpPr>
         <p:spPr>
           <a:xfrm>
-            <a:off x="5029200" y="2880360"/>
+            <a:off x="5029200" y="2999232"/>
             <a:ext cx="219456" cy="365760"/>
           </a:xfrm>
           <a:prstGeom prst="rect">
@@ -9804,8 +9804,8 @@
         </p:nvSpPr>
         <p:spPr>
           <a:xfrm>
-            <a:off x="5248656" y="1965960"/>
-            <a:ext cx="2084832" cy="2377440"/>
+            <a:off x="5248656" y="1920240"/>
+            <a:ext cx="2084832" cy="3200400"/>
           </a:xfrm>
           <a:prstGeom prst="roundRect">
             <a:avLst>
@@ -9838,7 +9838,7 @@
         </p:nvSpPr>
         <p:spPr>
           <a:xfrm>
-            <a:off x="6053328" y="2212848"/>
+            <a:off x="6053328" y="2286000"/>
             <a:ext cx="475488" cy="475488"/>
           </a:xfrm>
           <a:prstGeom prst="ellipse">
@@ -9858,7 +9858,7 @@
         </p:nvSpPr>
         <p:spPr>
           <a:xfrm>
-            <a:off x="6053328" y="2212848"/>
+            <a:off x="6053328" y="2286000"/>
             <a:ext cx="475488" cy="475488"/>
           </a:xfrm>
           <a:prstGeom prst="rect">
@@ -9897,8 +9897,8 @@
         </p:nvSpPr>
         <p:spPr>
           <a:xfrm>
-            <a:off x="5248656" y="2834640"/>
-            <a:ext cx="2084832" cy="365760"/>
+            <a:off x="5248656" y="2971800"/>
+            <a:ext cx="2084832" cy="411480"/>
           </a:xfrm>
           <a:prstGeom prst="rect">
             <a:avLst/>
@@ -9914,7 +9914,7 @@
               <a:buNone/>
             </a:pPr>
             <a:r>
-              <a:rPr lang="en-US" sz="1700" b="1" dirty="0">
+              <a:rPr lang="en-US" sz="1800" b="1" dirty="0">
                 <a:solidFill>
                   <a:srgbClr val="11253A"/>
                 </a:solidFill>
@@ -9924,7 +9924,7 @@
               </a:rPr>
               <a:t>Califica</a:t>
             </a:r>
-            <a:endParaRPr lang="en-US" sz="1700" dirty="0"/>
+            <a:endParaRPr lang="en-US" sz="1800" dirty="0"/>
           </a:p>
         </p:txBody>
       </p:sp>
@@ -9936,8 +9936,8 @@
         </p:nvSpPr>
         <p:spPr>
           <a:xfrm>
-            <a:off x="5385816" y="3246120"/>
-            <a:ext cx="1810512" cy="960120"/>
+            <a:off x="5385816" y="3520440"/>
+            <a:ext cx="1810512" cy="1371600"/>
           </a:xfrm>
           <a:prstGeom prst="rect">
             <a:avLst/>
@@ -9953,7 +9953,7 @@
               <a:buNone/>
             </a:pPr>
             <a:r>
-              <a:rPr lang="en-US" sz="1150" dirty="0">
+              <a:rPr lang="en-US" sz="1250" dirty="0">
                 <a:solidFill>
                   <a:srgbClr val="5C6B78"/>
                 </a:solidFill>
@@ -9963,14 +9963,14 @@
               </a:rPr>
               <a:t>Tres preguntas:</a:t>
             </a:r>
-            <a:endParaRPr lang="en-US" sz="1150" dirty="0"/>
+            <a:endParaRPr lang="en-US" sz="1250" dirty="0"/>
           </a:p>
           <a:p>
             <a:pPr algn="ctr" indent="0" marL="0">
               <a:buNone/>
             </a:pPr>
             <a:r>
-              <a:rPr lang="en-US" sz="1150" dirty="0">
+              <a:rPr lang="en-US" sz="1250" dirty="0">
                 <a:solidFill>
                   <a:srgbClr val="5C6B78"/>
                 </a:solidFill>
@@ -9980,14 +9980,14 @@
               </a:rPr>
               <a:t>uso, plazo y</a:t>
             </a:r>
-            <a:endParaRPr lang="en-US" sz="1150" dirty="0"/>
+            <a:endParaRPr lang="en-US" sz="1250" dirty="0"/>
           </a:p>
           <a:p>
             <a:pPr algn="ctr" indent="0" marL="0">
               <a:buNone/>
             </a:pPr>
             <a:r>
-              <a:rPr lang="en-US" sz="1150" dirty="0">
+              <a:rPr lang="en-US" sz="1250" dirty="0">
                 <a:solidFill>
                   <a:srgbClr val="5C6B78"/>
                 </a:solidFill>
@@ -9997,7 +9997,7 @@
               </a:rPr>
               <a:t>forma de pago</a:t>
             </a:r>
-            <a:endParaRPr lang="en-US" sz="1150" dirty="0"/>
+            <a:endParaRPr lang="en-US" sz="1250" dirty="0"/>
           </a:p>
         </p:txBody>
       </p:sp>
@@ -10009,7 +10009,7 @@
         </p:nvSpPr>
         <p:spPr>
           <a:xfrm>
-            <a:off x="7333488" y="2880360"/>
+            <a:off x="7333488" y="2999232"/>
             <a:ext cx="219456" cy="365760"/>
           </a:xfrm>
           <a:prstGeom prst="rect">
@@ -10048,8 +10048,8 @@
         </p:nvSpPr>
         <p:spPr>
           <a:xfrm>
-            <a:off x="7552944" y="1965960"/>
-            <a:ext cx="2084832" cy="2377440"/>
+            <a:off x="7552944" y="1920240"/>
+            <a:ext cx="2084832" cy="3200400"/>
           </a:xfrm>
           <a:prstGeom prst="roundRect">
             <a:avLst>
@@ -10082,7 +10082,7 @@
         </p:nvSpPr>
         <p:spPr>
           <a:xfrm>
-            <a:off x="8357616" y="2212848"/>
+            <a:off x="8357616" y="2286000"/>
             <a:ext cx="475488" cy="475488"/>
           </a:xfrm>
           <a:prstGeom prst="ellipse">
@@ -10102,7 +10102,7 @@
         </p:nvSpPr>
         <p:spPr>
           <a:xfrm>
-            <a:off x="8357616" y="2212848"/>
+            <a:off x="8357616" y="2286000"/>
             <a:ext cx="475488" cy="475488"/>
           </a:xfrm>
           <a:prstGeom prst="rect">
@@ -10141,8 +10141,8 @@
         </p:nvSpPr>
         <p:spPr>
           <a:xfrm>
-            <a:off x="7552944" y="2834640"/>
-            <a:ext cx="2084832" cy="365760"/>
+            <a:off x="7552944" y="2971800"/>
+            <a:ext cx="2084832" cy="411480"/>
           </a:xfrm>
           <a:prstGeom prst="rect">
             <a:avLst/>
@@ -10158,7 +10158,7 @@
               <a:buNone/>
             </a:pPr>
             <a:r>
-              <a:rPr lang="en-US" sz="1700" b="1" dirty="0">
+              <a:rPr lang="en-US" sz="1800" b="1" dirty="0">
                 <a:solidFill>
                   <a:srgbClr val="11253A"/>
                 </a:solidFill>
@@ -10168,7 +10168,7 @@
               </a:rPr>
               <a:t>Registra</a:t>
             </a:r>
-            <a:endParaRPr lang="en-US" sz="1700" dirty="0"/>
+            <a:endParaRPr lang="en-US" sz="1800" dirty="0"/>
           </a:p>
         </p:txBody>
       </p:sp>
@@ -10180,8 +10180,8 @@
         </p:nvSpPr>
         <p:spPr>
           <a:xfrm>
-            <a:off x="7690104" y="3246120"/>
-            <a:ext cx="1810512" cy="960120"/>
+            <a:off x="7690104" y="3520440"/>
+            <a:ext cx="1810512" cy="1371600"/>
           </a:xfrm>
           <a:prstGeom prst="rect">
             <a:avLst/>
@@ -10197,7 +10197,7 @@
               <a:buNone/>
             </a:pPr>
             <a:r>
-              <a:rPr lang="en-US" sz="1150" dirty="0">
+              <a:rPr lang="en-US" sz="1250" dirty="0">
                 <a:solidFill>
                   <a:srgbClr val="5C6B78"/>
                 </a:solidFill>
@@ -10207,14 +10207,14 @@
               </a:rPr>
               <a:t>Nombre y teléfono</a:t>
             </a:r>
-            <a:endParaRPr lang="en-US" sz="1150" dirty="0"/>
+            <a:endParaRPr lang="en-US" sz="1250" dirty="0"/>
           </a:p>
           <a:p>
             <a:pPr algn="ctr" indent="0" marL="0">
               <a:buNone/>
             </a:pPr>
             <a:r>
-              <a:rPr lang="en-US" sz="1150" dirty="0">
+              <a:rPr lang="en-US" sz="1250" dirty="0">
                 <a:solidFill>
                   <a:srgbClr val="5C6B78"/>
                 </a:solidFill>
@@ -10224,14 +10224,14 @@
               </a:rPr>
               <a:t>quedan guardados</a:t>
             </a:r>
-            <a:endParaRPr lang="en-US" sz="1150" dirty="0"/>
+            <a:endParaRPr lang="en-US" sz="1250" dirty="0"/>
           </a:p>
           <a:p>
             <a:pPr algn="ctr" indent="0" marL="0">
               <a:buNone/>
             </a:pPr>
             <a:r>
-              <a:rPr lang="en-US" sz="1150" dirty="0">
+              <a:rPr lang="en-US" sz="1250" dirty="0">
                 <a:solidFill>
                   <a:srgbClr val="5C6B78"/>
                 </a:solidFill>
@@ -10241,7 +10241,7 @@
               </a:rPr>
               <a:t>en el panel</a:t>
             </a:r>
-            <a:endParaRPr lang="en-US" sz="1150" dirty="0"/>
+            <a:endParaRPr lang="en-US" sz="1250" dirty="0"/>
           </a:p>
         </p:txBody>
       </p:sp>
@@ -10253,7 +10253,7 @@
         </p:nvSpPr>
         <p:spPr>
           <a:xfrm>
-            <a:off x="9637776" y="2880360"/>
+            <a:off x="9637776" y="2999232"/>
             <a:ext cx="219456" cy="365760"/>
           </a:xfrm>
           <a:prstGeom prst="rect">
@@ -10292,8 +10292,8 @@
         </p:nvSpPr>
         <p:spPr>
           <a:xfrm>
-            <a:off x="9857232" y="1965960"/>
-            <a:ext cx="2084832" cy="2377440"/>
+            <a:off x="9857232" y="1920240"/>
+            <a:ext cx="2084832" cy="3200400"/>
           </a:xfrm>
           <a:prstGeom prst="roundRect">
             <a:avLst>
@@ -10326,7 +10326,7 @@
         </p:nvSpPr>
         <p:spPr>
           <a:xfrm>
-            <a:off x="10661904" y="2212848"/>
+            <a:off x="10661904" y="2286000"/>
             <a:ext cx="475488" cy="475488"/>
           </a:xfrm>
           <a:prstGeom prst="ellipse">
@@ -10346,7 +10346,7 @@
         </p:nvSpPr>
         <p:spPr>
           <a:xfrm>
-            <a:off x="10661904" y="2212848"/>
+            <a:off x="10661904" y="2286000"/>
             <a:ext cx="475488" cy="475488"/>
           </a:xfrm>
           <a:prstGeom prst="rect">
@@ -10385,8 +10385,8 @@
         </p:nvSpPr>
         <p:spPr>
           <a:xfrm>
-            <a:off x="9857232" y="2834640"/>
-            <a:ext cx="2084832" cy="365760"/>
+            <a:off x="9857232" y="2971800"/>
+            <a:ext cx="2084832" cy="411480"/>
           </a:xfrm>
           <a:prstGeom prst="rect">
             <a:avLst/>
@@ -10402,7 +10402,7 @@
               <a:buNone/>
             </a:pPr>
             <a:r>
-              <a:rPr lang="en-US" sz="1700" b="1" dirty="0">
+              <a:rPr lang="en-US" sz="1800" b="1" dirty="0">
                 <a:solidFill>
                   <a:srgbClr val="11253A"/>
                 </a:solidFill>
@@ -10412,7 +10412,7 @@
               </a:rPr>
               <a:t>Avisa</a:t>
             </a:r>
-            <a:endParaRPr lang="en-US" sz="1700" dirty="0"/>
+            <a:endParaRPr lang="en-US" sz="1800" dirty="0"/>
           </a:p>
         </p:txBody>
       </p:sp>
@@ -10424,8 +10424,8 @@
         </p:nvSpPr>
         <p:spPr>
           <a:xfrm>
-            <a:off x="9994392" y="3246120"/>
-            <a:ext cx="1810512" cy="960120"/>
+            <a:off x="9994392" y="3520440"/>
+            <a:ext cx="1810512" cy="1371600"/>
           </a:xfrm>
           <a:prstGeom prst="rect">
             <a:avLst/>
@@ -10441,7 +10441,7 @@
               <a:buNone/>
             </a:pPr>
             <a:r>
-              <a:rPr lang="en-US" sz="1150" dirty="0">
+              <a:rPr lang="en-US" sz="1250" dirty="0">
                 <a:solidFill>
                   <a:srgbClr val="5C6B78"/>
                 </a:solidFill>
@@ -10451,14 +10451,14 @@
               </a:rPr>
               <a:t>Si es caliente,</a:t>
             </a:r>
-            <a:endParaRPr lang="en-US" sz="1150" dirty="0"/>
+            <a:endParaRPr lang="en-US" sz="1250" dirty="0"/>
           </a:p>
           <a:p>
             <a:pPr algn="ctr" indent="0" marL="0">
               <a:buNone/>
             </a:pPr>
             <a:r>
-              <a:rPr lang="en-US" sz="1150" dirty="0">
+              <a:rPr lang="en-US" sz="1250" dirty="0">
                 <a:solidFill>
                   <a:srgbClr val="5C6B78"/>
                 </a:solidFill>
@@ -10468,14 +10468,14 @@
               </a:rPr>
               <a:t>el asesor recibe</a:t>
             </a:r>
-            <a:endParaRPr lang="en-US" sz="1150" dirty="0"/>
+            <a:endParaRPr lang="en-US" sz="1250" dirty="0"/>
           </a:p>
           <a:p>
             <a:pPr algn="ctr" indent="0" marL="0">
               <a:buNone/>
             </a:pPr>
             <a:r>
-              <a:rPr lang="en-US" sz="1150" dirty="0">
+              <a:rPr lang="en-US" sz="1250" dirty="0">
                 <a:solidFill>
                   <a:srgbClr val="5C6B78"/>
                 </a:solidFill>
@@ -10485,7 +10485,7 @@
               </a:rPr>
               <a:t>aviso al momento</a:t>
             </a:r>
-            <a:endParaRPr lang="en-US" sz="1150" dirty="0"/>
+            <a:endParaRPr lang="en-US" sz="1250" dirty="0"/>
           </a:p>
         </p:txBody>
       </p:sp>
@@ -10497,7 +10497,7 @@
         </p:nvSpPr>
         <p:spPr>
           <a:xfrm>
-            <a:off x="640080" y="4754880"/>
+            <a:off x="640080" y="5760720"/>
             <a:ext cx="10881360" cy="457200"/>
           </a:xfrm>
           <a:prstGeom prst="rect">
@@ -10646,12 +10646,12 @@
         </p:nvSpPr>
         <p:spPr>
           <a:xfrm>
-            <a:off x="640080" y="1874520"/>
-            <a:ext cx="5257800" cy="1371600"/>
+            <a:off x="640080" y="1783080"/>
+            <a:ext cx="5257800" cy="1828800"/>
           </a:xfrm>
           <a:prstGeom prst="roundRect">
             <a:avLst>
-              <a:gd name="adj" fmla="val 6000"/>
+              <a:gd name="adj" fmla="val 4500"/>
             </a:avLst>
           </a:prstGeom>
           <a:solidFill>
@@ -10680,7 +10680,7 @@
         </p:nvSpPr>
         <p:spPr>
           <a:xfrm>
-            <a:off x="960120" y="2057400"/>
+            <a:off x="960120" y="1965960"/>
             <a:ext cx="3108960" cy="365760"/>
           </a:xfrm>
           <a:prstGeom prst="rect">
@@ -10719,7 +10719,7 @@
         </p:nvSpPr>
         <p:spPr>
           <a:xfrm>
-            <a:off x="4343400" y="2075688"/>
+            <a:off x="4343400" y="1984248"/>
             <a:ext cx="1280160" cy="310896"/>
           </a:xfrm>
           <a:prstGeom prst="roundRect">
@@ -10746,7 +10746,7 @@
         </p:nvSpPr>
         <p:spPr>
           <a:xfrm>
-            <a:off x="4343400" y="2075688"/>
+            <a:off x="4343400" y="1984248"/>
             <a:ext cx="1280160" cy="310896"/>
           </a:xfrm>
           <a:prstGeom prst="rect">
@@ -10785,24 +10785,24 @@
         </p:nvSpPr>
         <p:spPr>
           <a:xfrm>
-            <a:off x="960120" y="2496312"/>
-            <a:ext cx="4617720" cy="640080"/>
-          </a:xfrm>
-          <a:prstGeom prst="rect">
-            <a:avLst/>
-          </a:prstGeom>
-          <a:noFill/>
-          <a:ln/>
-        </p:spPr>
-        <p:txBody>
-          <a:bodyPr wrap="square" lIns="0" tIns="0" rIns="0" bIns="0" rtlCol="0" anchor="ctr"/>
-          <a:lstStyle/>
-          <a:p>
-            <a:pPr indent="0" marL="0">
-              <a:buNone/>
-            </a:pPr>
-            <a:r>
-              <a:rPr lang="en-US" sz="1250" dirty="0">
+            <a:off x="960120" y="2560320"/>
+            <a:ext cx="4617720" cy="868680"/>
+          </a:xfrm>
+          <a:prstGeom prst="rect">
+            <a:avLst/>
+          </a:prstGeom>
+          <a:noFill/>
+          <a:ln/>
+        </p:spPr>
+        <p:txBody>
+          <a:bodyPr wrap="square" lIns="0" tIns="0" rIns="0" bIns="0" rtlCol="0" anchor="ctr"/>
+          <a:lstStyle/>
+          <a:p>
+            <a:pPr indent="0" marL="0">
+              <a:buNone/>
+            </a:pPr>
+            <a:r>
+              <a:rPr lang="en-US" sz="1350" dirty="0">
                 <a:solidFill>
                   <a:srgbClr val="5C6B78"/>
                 </a:solidFill>
@@ -10812,7 +10812,7 @@
               </a:rPr>
               <a:t>Chat propio en el sitio de terrenos, con las 8 plazas y sus mensualidades.</a:t>
             </a:r>
-            <a:endParaRPr lang="en-US" sz="1250" dirty="0"/>
+            <a:endParaRPr lang="en-US" sz="1350" dirty="0"/>
           </a:p>
         </p:txBody>
       </p:sp>
@@ -10824,12 +10824,12 @@
         </p:nvSpPr>
         <p:spPr>
           <a:xfrm>
-            <a:off x="6263640" y="1874520"/>
-            <a:ext cx="5257800" cy="1371600"/>
+            <a:off x="6263640" y="1783080"/>
+            <a:ext cx="5257800" cy="1828800"/>
           </a:xfrm>
           <a:prstGeom prst="roundRect">
             <a:avLst>
-              <a:gd name="adj" fmla="val 6000"/>
+              <a:gd name="adj" fmla="val 4500"/>
             </a:avLst>
           </a:prstGeom>
           <a:solidFill>
@@ -10858,7 +10858,7 @@
         </p:nvSpPr>
         <p:spPr>
           <a:xfrm>
-            <a:off x="6583680" y="2057400"/>
+            <a:off x="6583680" y="1965960"/>
             <a:ext cx="3108960" cy="365760"/>
           </a:xfrm>
           <a:prstGeom prst="rect">
@@ -10897,7 +10897,7 @@
         </p:nvSpPr>
         <p:spPr>
           <a:xfrm>
-            <a:off x="9966960" y="2075688"/>
+            <a:off x="9966960" y="1984248"/>
             <a:ext cx="1280160" cy="310896"/>
           </a:xfrm>
           <a:prstGeom prst="roundRect">
@@ -10924,7 +10924,7 @@
         </p:nvSpPr>
         <p:spPr>
           <a:xfrm>
-            <a:off x="9966960" y="2075688"/>
+            <a:off x="9966960" y="1984248"/>
             <a:ext cx="1280160" cy="310896"/>
           </a:xfrm>
           <a:prstGeom prst="rect">
@@ -10963,24 +10963,24 @@
         </p:nvSpPr>
         <p:spPr>
           <a:xfrm>
-            <a:off x="6583680" y="2496312"/>
-            <a:ext cx="4617720" cy="640080"/>
-          </a:xfrm>
-          <a:prstGeom prst="rect">
-            <a:avLst/>
-          </a:prstGeom>
-          <a:noFill/>
-          <a:ln/>
-        </p:spPr>
-        <p:txBody>
-          <a:bodyPr wrap="square" lIns="0" tIns="0" rIns="0" bIns="0" rtlCol="0" anchor="ctr"/>
-          <a:lstStyle/>
-          <a:p>
-            <a:pPr indent="0" marL="0">
-              <a:buNone/>
-            </a:pPr>
-            <a:r>
-              <a:rPr lang="en-US" sz="1250" dirty="0">
+            <a:off x="6583680" y="2560320"/>
+            <a:ext cx="4617720" cy="868680"/>
+          </a:xfrm>
+          <a:prstGeom prst="rect">
+            <a:avLst/>
+          </a:prstGeom>
+          <a:noFill/>
+          <a:ln/>
+        </p:spPr>
+        <p:txBody>
+          <a:bodyPr wrap="square" lIns="0" tIns="0" rIns="0" bIns="0" rtlCol="0" anchor="ctr"/>
+          <a:lstStyle/>
+          <a:p>
+            <a:pPr indent="0" marL="0">
+              <a:buNone/>
+            </a:pPr>
+            <a:r>
+              <a:rPr lang="en-US" sz="1350" dirty="0">
                 <a:solidFill>
                   <a:srgbClr val="5C6B78"/>
                 </a:solidFill>
@@ -10990,7 +10990,7 @@
               </a:rPr>
               <a:t>Contesta los mensajes de la página y los comentarios de las publicaciones.</a:t>
             </a:r>
-            <a:endParaRPr lang="en-US" sz="1250" dirty="0"/>
+            <a:endParaRPr lang="en-US" sz="1350" dirty="0"/>
           </a:p>
         </p:txBody>
       </p:sp>
@@ -11002,12 +11002,12 @@
         </p:nvSpPr>
         <p:spPr>
           <a:xfrm>
-            <a:off x="640080" y="3447288"/>
-            <a:ext cx="5257800" cy="1371600"/>
+            <a:off x="640080" y="3886200"/>
+            <a:ext cx="5257800" cy="1828800"/>
           </a:xfrm>
           <a:prstGeom prst="roundRect">
             <a:avLst>
-              <a:gd name="adj" fmla="val 6000"/>
+              <a:gd name="adj" fmla="val 4500"/>
             </a:avLst>
           </a:prstGeom>
           <a:solidFill>
@@ -11036,7 +11036,7 @@
         </p:nvSpPr>
         <p:spPr>
           <a:xfrm>
-            <a:off x="960120" y="3630168"/>
+            <a:off x="960120" y="4069080"/>
             <a:ext cx="3108960" cy="365760"/>
           </a:xfrm>
           <a:prstGeom prst="rect">
@@ -11075,7 +11075,7 @@
         </p:nvSpPr>
         <p:spPr>
           <a:xfrm>
-            <a:off x="4343400" y="3648456"/>
+            <a:off x="4343400" y="4087368"/>
             <a:ext cx="1280160" cy="310896"/>
           </a:xfrm>
           <a:prstGeom prst="roundRect">
@@ -11102,7 +11102,7 @@
         </p:nvSpPr>
         <p:spPr>
           <a:xfrm>
-            <a:off x="4343400" y="3648456"/>
+            <a:off x="4343400" y="4087368"/>
             <a:ext cx="1280160" cy="310896"/>
           </a:xfrm>
           <a:prstGeom prst="rect">
@@ -11141,24 +11141,24 @@
         </p:nvSpPr>
         <p:spPr>
           <a:xfrm>
-            <a:off x="960120" y="4069080"/>
-            <a:ext cx="4617720" cy="640080"/>
-          </a:xfrm>
-          <a:prstGeom prst="rect">
-            <a:avLst/>
-          </a:prstGeom>
-          <a:noFill/>
-          <a:ln/>
-        </p:spPr>
-        <p:txBody>
-          <a:bodyPr wrap="square" lIns="0" tIns="0" rIns="0" bIns="0" rtlCol="0" anchor="ctr"/>
-          <a:lstStyle/>
-          <a:p>
-            <a:pPr indent="0" marL="0">
-              <a:buNone/>
-            </a:pPr>
-            <a:r>
-              <a:rPr lang="en-US" sz="1250" dirty="0">
+            <a:off x="960120" y="4663440"/>
+            <a:ext cx="4617720" cy="868680"/>
+          </a:xfrm>
+          <a:prstGeom prst="rect">
+            <a:avLst/>
+          </a:prstGeom>
+          <a:noFill/>
+          <a:ln/>
+        </p:spPr>
+        <p:txBody>
+          <a:bodyPr wrap="square" lIns="0" tIns="0" rIns="0" bIns="0" rtlCol="0" anchor="ctr"/>
+          <a:lstStyle/>
+          <a:p>
+            <a:pPr indent="0" marL="0">
+              <a:buNone/>
+            </a:pPr>
+            <a:r>
+              <a:rPr lang="en-US" sz="1350" dirty="0">
                 <a:solidFill>
                   <a:srgbClr val="5C6B78"/>
                 </a:solidFill>
@@ -11168,7 +11168,7 @@
               </a:rPr>
               <a:t>Mensajes directos y comentarios, incluidos los de las solicitudes.</a:t>
             </a:r>
-            <a:endParaRPr lang="en-US" sz="1250" dirty="0"/>
+            <a:endParaRPr lang="en-US" sz="1350" dirty="0"/>
           </a:p>
         </p:txBody>
       </p:sp>
@@ -11180,12 +11180,12 @@
         </p:nvSpPr>
         <p:spPr>
           <a:xfrm>
-            <a:off x="6263640" y="3447288"/>
-            <a:ext cx="5257800" cy="1371600"/>
+            <a:off x="6263640" y="3886200"/>
+            <a:ext cx="5257800" cy="1828800"/>
           </a:xfrm>
           <a:prstGeom prst="roundRect">
             <a:avLst>
-              <a:gd name="adj" fmla="val 6000"/>
+              <a:gd name="adj" fmla="val 4500"/>
             </a:avLst>
           </a:prstGeom>
           <a:solidFill>
@@ -11214,7 +11214,7 @@
         </p:nvSpPr>
         <p:spPr>
           <a:xfrm>
-            <a:off x="6583680" y="3630168"/>
+            <a:off x="6583680" y="4069080"/>
             <a:ext cx="3108960" cy="365760"/>
           </a:xfrm>
           <a:prstGeom prst="rect">
@@ -11253,7 +11253,7 @@
         </p:nvSpPr>
         <p:spPr>
           <a:xfrm>
-            <a:off x="9966960" y="3648456"/>
+            <a:off x="9966960" y="4087368"/>
             <a:ext cx="1280160" cy="310896"/>
           </a:xfrm>
           <a:prstGeom prst="roundRect">
@@ -11280,7 +11280,7 @@
         </p:nvSpPr>
         <p:spPr>
           <a:xfrm>
-            <a:off x="9966960" y="3648456"/>
+            <a:off x="9966960" y="4087368"/>
             <a:ext cx="1280160" cy="310896"/>
           </a:xfrm>
           <a:prstGeom prst="rect">
@@ -11319,24 +11319,24 @@
         </p:nvSpPr>
         <p:spPr>
           <a:xfrm>
-            <a:off x="6583680" y="4069080"/>
-            <a:ext cx="4617720" cy="640080"/>
-          </a:xfrm>
-          <a:prstGeom prst="rect">
-            <a:avLst/>
-          </a:prstGeom>
-          <a:noFill/>
-          <a:ln/>
-        </p:spPr>
-        <p:txBody>
-          <a:bodyPr wrap="square" lIns="0" tIns="0" rIns="0" bIns="0" rtlCol="0" anchor="ctr"/>
-          <a:lstStyle/>
-          <a:p>
-            <a:pPr indent="0" marL="0">
-              <a:buNone/>
-            </a:pPr>
-            <a:r>
-              <a:rPr lang="en-US" sz="1250" dirty="0">
+            <a:off x="6583680" y="4663440"/>
+            <a:ext cx="4617720" cy="868680"/>
+          </a:xfrm>
+          <a:prstGeom prst="rect">
+            <a:avLst/>
+          </a:prstGeom>
+          <a:noFill/>
+          <a:ln/>
+        </p:spPr>
+        <p:txBody>
+          <a:bodyPr wrap="square" lIns="0" tIns="0" rIns="0" bIns="0" rtlCol="0" anchor="ctr"/>
+          <a:lstStyle/>
+          <a:p>
+            <a:pPr indent="0" marL="0">
+              <a:buNone/>
+            </a:pPr>
+            <a:r>
+              <a:rPr lang="en-US" sz="1350" dirty="0">
                 <a:solidFill>
                   <a:srgbClr val="5C6B78"/>
                 </a:solidFill>
@@ -11346,7 +11346,7 @@
               </a:rPr>
               <a:t>Coexistencia: el bot atiende y el asesor puede tomar el chat desde su propio teléfono.</a:t>
             </a:r>
-            <a:endParaRPr lang="en-US" sz="1250" dirty="0"/>
+            <a:endParaRPr lang="en-US" sz="1350" dirty="0"/>
           </a:p>
         </p:txBody>
       </p:sp>
@@ -11358,7 +11358,7 @@
         </p:nvSpPr>
         <p:spPr>
           <a:xfrm>
-            <a:off x="640080" y="5120640"/>
+            <a:off x="640080" y="5943600"/>
             <a:ext cx="10881360" cy="457200"/>
           </a:xfrm>
           <a:prstGeom prst="rect">
@@ -11536,7 +11536,7 @@
         </p:nvSpPr>
         <p:spPr>
           <a:xfrm>
-            <a:off x="640080" y="1965960"/>
+            <a:off x="640080" y="2011680"/>
             <a:ext cx="420624" cy="420624"/>
           </a:xfrm>
           <a:prstGeom prst="ellipse">
@@ -11556,7 +11556,7 @@
         </p:nvSpPr>
         <p:spPr>
           <a:xfrm>
-            <a:off x="640080" y="1965960"/>
+            <a:off x="640080" y="2011680"/>
             <a:ext cx="420624" cy="420624"/>
           </a:xfrm>
           <a:prstGeom prst="rect">
@@ -11595,7 +11595,7 @@
         </p:nvSpPr>
         <p:spPr>
           <a:xfrm>
-            <a:off x="1261872" y="1929384"/>
+            <a:off x="1261872" y="1975104"/>
             <a:ext cx="5486400" cy="320040"/>
           </a:xfrm>
           <a:prstGeom prst="rect">
@@ -11634,24 +11634,24 @@
         </p:nvSpPr>
         <p:spPr>
           <a:xfrm>
-            <a:off x="1261872" y="2258568"/>
-            <a:ext cx="5486400" cy="731520"/>
-          </a:xfrm>
-          <a:prstGeom prst="rect">
-            <a:avLst/>
-          </a:prstGeom>
-          <a:noFill/>
-          <a:ln/>
-        </p:spPr>
-        <p:txBody>
-          <a:bodyPr wrap="square" lIns="0" tIns="0" rIns="0" bIns="0" rtlCol="0" anchor="ctr"/>
-          <a:lstStyle/>
-          <a:p>
-            <a:pPr indent="0" marL="0">
-              <a:buNone/>
-            </a:pPr>
-            <a:r>
-              <a:rPr lang="en-US" sz="1250" dirty="0">
+            <a:off x="1261872" y="2340864"/>
+            <a:ext cx="5486400" cy="914400"/>
+          </a:xfrm>
+          <a:prstGeom prst="rect">
+            <a:avLst/>
+          </a:prstGeom>
+          <a:noFill/>
+          <a:ln/>
+        </p:spPr>
+        <p:txBody>
+          <a:bodyPr wrap="square" lIns="0" tIns="0" rIns="0" bIns="0" rtlCol="0" anchor="ctr"/>
+          <a:lstStyle/>
+          <a:p>
+            <a:pPr indent="0" marL="0">
+              <a:buNone/>
+            </a:pPr>
+            <a:r>
+              <a:rPr lang="en-US" sz="1350" dirty="0">
                 <a:solidFill>
                   <a:srgbClr val="5C6B78"/>
                 </a:solidFill>
@@ -11661,7 +11661,7 @@
               </a:rPr>
               <a:t>Cualquier comentario cuenta, no solo los que piden precio. Quien comentó ya se detuvo en la publicación.</a:t>
             </a:r>
-            <a:endParaRPr lang="en-US" sz="1250" dirty="0"/>
+            <a:endParaRPr lang="en-US" sz="1350" dirty="0"/>
           </a:p>
         </p:txBody>
       </p:sp>
@@ -11673,7 +11673,7 @@
         </p:nvSpPr>
         <p:spPr>
           <a:xfrm>
-            <a:off x="640080" y="3200400"/>
+            <a:off x="640080" y="3383280"/>
             <a:ext cx="420624" cy="420624"/>
           </a:xfrm>
           <a:prstGeom prst="ellipse">
@@ -11693,7 +11693,7 @@
         </p:nvSpPr>
         <p:spPr>
           <a:xfrm>
-            <a:off x="640080" y="3200400"/>
+            <a:off x="640080" y="3383280"/>
             <a:ext cx="420624" cy="420624"/>
           </a:xfrm>
           <a:prstGeom prst="rect">
@@ -11732,7 +11732,7 @@
         </p:nvSpPr>
         <p:spPr>
           <a:xfrm>
-            <a:off x="1261872" y="3163824"/>
+            <a:off x="1261872" y="3346704"/>
             <a:ext cx="5486400" cy="320040"/>
           </a:xfrm>
           <a:prstGeom prst="rect">
@@ -11771,24 +11771,24 @@
         </p:nvSpPr>
         <p:spPr>
           <a:xfrm>
-            <a:off x="1261872" y="3493008"/>
-            <a:ext cx="5486400" cy="731520"/>
-          </a:xfrm>
-          <a:prstGeom prst="rect">
-            <a:avLst/>
-          </a:prstGeom>
-          <a:noFill/>
-          <a:ln/>
-        </p:spPr>
-        <p:txBody>
-          <a:bodyPr wrap="square" lIns="0" tIns="0" rIns="0" bIns="0" rtlCol="0" anchor="ctr"/>
-          <a:lstStyle/>
-          <a:p>
-            <a:pPr indent="0" marL="0">
-              <a:buNone/>
-            </a:pPr>
-            <a:r>
-              <a:rPr lang="en-US" sz="1250" dirty="0">
+            <a:off x="1261872" y="3712464"/>
+            <a:ext cx="5486400" cy="914400"/>
+          </a:xfrm>
+          <a:prstGeom prst="rect">
+            <a:avLst/>
+          </a:prstGeom>
+          <a:noFill/>
+          <a:ln/>
+        </p:spPr>
+        <p:txBody>
+          <a:bodyPr wrap="square" lIns="0" tIns="0" rIns="0" bIns="0" rtlCol="0" anchor="ctr"/>
+          <a:lstStyle/>
+          <a:p>
+            <a:pPr indent="0" marL="0">
+              <a:buNone/>
+            </a:pPr>
+            <a:r>
+              <a:rPr lang="en-US" sz="1350" dirty="0">
                 <a:solidFill>
                   <a:srgbClr val="5C6B78"/>
                 </a:solidFill>
@@ -11798,7 +11798,7 @@
               </a:rPr>
               <a:t>Recibe un mensaje privado al instante, y una respuesta pública debajo de su comentario.</a:t>
             </a:r>
-            <a:endParaRPr lang="en-US" sz="1250" dirty="0"/>
+            <a:endParaRPr lang="en-US" sz="1350" dirty="0"/>
           </a:p>
         </p:txBody>
       </p:sp>
@@ -11810,7 +11810,7 @@
         </p:nvSpPr>
         <p:spPr>
           <a:xfrm>
-            <a:off x="640080" y="4434840"/>
+            <a:off x="640080" y="4754880"/>
             <a:ext cx="420624" cy="420624"/>
           </a:xfrm>
           <a:prstGeom prst="ellipse">
@@ -11830,7 +11830,7 @@
         </p:nvSpPr>
         <p:spPr>
           <a:xfrm>
-            <a:off x="640080" y="4434840"/>
+            <a:off x="640080" y="4754880"/>
             <a:ext cx="420624" cy="420624"/>
           </a:xfrm>
           <a:prstGeom prst="rect">
@@ -11869,7 +11869,7 @@
         </p:nvSpPr>
         <p:spPr>
           <a:xfrm>
-            <a:off x="1261872" y="4398264"/>
+            <a:off x="1261872" y="4718304"/>
             <a:ext cx="5486400" cy="320040"/>
           </a:xfrm>
           <a:prstGeom prst="rect">
@@ -11908,24 +11908,24 @@
         </p:nvSpPr>
         <p:spPr>
           <a:xfrm>
-            <a:off x="1261872" y="4727448"/>
-            <a:ext cx="5486400" cy="731520"/>
-          </a:xfrm>
-          <a:prstGeom prst="rect">
-            <a:avLst/>
-          </a:prstGeom>
-          <a:noFill/>
-          <a:ln/>
-        </p:spPr>
-        <p:txBody>
-          <a:bodyPr wrap="square" lIns="0" tIns="0" rIns="0" bIns="0" rtlCol="0" anchor="ctr"/>
-          <a:lstStyle/>
-          <a:p>
-            <a:pPr indent="0" marL="0">
-              <a:buNone/>
-            </a:pPr>
-            <a:r>
-              <a:rPr lang="en-US" sz="1250" dirty="0">
+            <a:off x="1261872" y="5084064"/>
+            <a:ext cx="5486400" cy="914400"/>
+          </a:xfrm>
+          <a:prstGeom prst="rect">
+            <a:avLst/>
+          </a:prstGeom>
+          <a:noFill/>
+          <a:ln/>
+        </p:spPr>
+        <p:txBody>
+          <a:bodyPr wrap="square" lIns="0" tIns="0" rIns="0" bIns="0" rtlCol="0" anchor="ctr"/>
+          <a:lstStyle/>
+          <a:p>
+            <a:pPr indent="0" marL="0">
+              <a:buNone/>
+            </a:pPr>
+            <a:r>
+              <a:rPr lang="en-US" sz="1350" dirty="0">
                 <a:solidFill>
                   <a:srgbClr val="5C6B78"/>
                 </a:solidFill>
@@ -11935,7 +11935,7 @@
               </a:rPr>
               <a:t>El mensaje termina con una pregunta. Cuando la persona responde, arranca el guion completo.</a:t>
             </a:r>
-            <a:endParaRPr lang="en-US" sz="1250" dirty="0"/>
+            <a:endParaRPr lang="en-US" sz="1350" dirty="0"/>
           </a:p>
         </p:txBody>
       </p:sp>
@@ -11947,7 +11947,7 @@
         </p:nvSpPr>
         <p:spPr>
           <a:xfrm>
-            <a:off x="640080" y="5806440"/>
+            <a:off x="640080" y="6080760"/>
             <a:ext cx="6126480" cy="457200"/>
           </a:xfrm>
           <a:prstGeom prst="rect">
@@ -11964,7 +11964,7 @@
               <a:buNone/>
             </a:pPr>
             <a:r>
-              <a:rPr lang="en-US" sz="1250" i="1" dirty="0">
+              <a:rPr lang="en-US" sz="1300" i="1" dirty="0">
                 <a:solidFill>
                   <a:srgbClr val="11253A"/>
                 </a:solidFill>
@@ -11974,7 +11974,7 @@
               </a:rPr>
               <a:t>Los reclamos quedan fuera a propósito: esos los atiende el asesor en persona.</a:t>
             </a:r>
-            <a:endParaRPr lang="en-US" sz="1250" dirty="0"/>
+            <a:endParaRPr lang="en-US" sz="1300" dirty="0"/>
           </a:p>
         </p:txBody>
       </p:sp>
@@ -12284,11 +12284,11 @@
         <p:spPr>
           <a:xfrm>
             <a:off x="640080" y="1828800"/>
-            <a:ext cx="5257800" cy="2834640"/>
+            <a:ext cx="5257800" cy="3611880"/>
           </a:xfrm>
           <a:prstGeom prst="roundRect">
             <a:avLst>
-              <a:gd name="adj" fmla="val 2903"/>
+              <a:gd name="adj" fmla="val 2278"/>
             </a:avLst>
           </a:prstGeom>
           <a:solidFill>
@@ -12356,7 +12356,7 @@
         </p:nvSpPr>
         <p:spPr>
           <a:xfrm>
-            <a:off x="960120" y="2450592"/>
+            <a:off x="960120" y="2514600"/>
             <a:ext cx="3291840" cy="566928"/>
           </a:xfrm>
           <a:prstGeom prst="roundRect">
@@ -12383,7 +12383,7 @@
         </p:nvSpPr>
         <p:spPr>
           <a:xfrm>
-            <a:off x="1106424" y="2450592"/>
+            <a:off x="1106424" y="2514600"/>
             <a:ext cx="2999232" cy="566928"/>
           </a:xfrm>
           <a:prstGeom prst="rect">
@@ -12422,7 +12422,7 @@
         </p:nvSpPr>
         <p:spPr>
           <a:xfrm>
-            <a:off x="960120" y="3127248"/>
+            <a:off x="960120" y="3337560"/>
             <a:ext cx="4206240" cy="566928"/>
           </a:xfrm>
           <a:prstGeom prst="roundRect">
@@ -12449,7 +12449,7 @@
         </p:nvSpPr>
         <p:spPr>
           <a:xfrm>
-            <a:off x="1106424" y="3127248"/>
+            <a:off x="1106424" y="3337560"/>
             <a:ext cx="3913632" cy="566928"/>
           </a:xfrm>
           <a:prstGeom prst="rect">
@@ -12488,7 +12488,7 @@
         </p:nvSpPr>
         <p:spPr>
           <a:xfrm>
-            <a:off x="960120" y="3931920"/>
+            <a:off x="960120" y="4206240"/>
             <a:ext cx="4617720" cy="457200"/>
           </a:xfrm>
           <a:prstGeom prst="rect">
@@ -12528,11 +12528,11 @@
         <p:spPr>
           <a:xfrm>
             <a:off x="6263640" y="1828800"/>
-            <a:ext cx="5257800" cy="2834640"/>
+            <a:ext cx="5257800" cy="3611880"/>
           </a:xfrm>
           <a:prstGeom prst="roundRect">
             <a:avLst>
-              <a:gd name="adj" fmla="val 2903"/>
+              <a:gd name="adj" fmla="val 2278"/>
             </a:avLst>
           </a:prstGeom>
           <a:solidFill>
@@ -12600,7 +12600,7 @@
         </p:nvSpPr>
         <p:spPr>
           <a:xfrm>
-            <a:off x="6583680" y="2450592"/>
+            <a:off x="6583680" y="2514600"/>
             <a:ext cx="3291840" cy="566928"/>
           </a:xfrm>
           <a:prstGeom prst="roundRect">
@@ -12627,7 +12627,7 @@
         </p:nvSpPr>
         <p:spPr>
           <a:xfrm>
-            <a:off x="6729984" y="2450592"/>
+            <a:off x="6729984" y="2514600"/>
             <a:ext cx="2999232" cy="566928"/>
           </a:xfrm>
           <a:prstGeom prst="rect">
@@ -12666,7 +12666,7 @@
         </p:nvSpPr>
         <p:spPr>
           <a:xfrm>
-            <a:off x="6583680" y="3127248"/>
+            <a:off x="6583680" y="3337560"/>
             <a:ext cx="4617720" cy="960120"/>
           </a:xfrm>
           <a:prstGeom prst="roundRect">
@@ -12693,7 +12693,7 @@
         </p:nvSpPr>
         <p:spPr>
           <a:xfrm>
-            <a:off x="6729984" y="3127248"/>
+            <a:off x="6729984" y="3337560"/>
             <a:ext cx="4325112" cy="960120"/>
           </a:xfrm>
           <a:prstGeom prst="rect">
@@ -12732,7 +12732,7 @@
         </p:nvSpPr>
         <p:spPr>
           <a:xfrm>
-            <a:off x="6583680" y="4206240"/>
+            <a:off x="6583680" y="4526280"/>
             <a:ext cx="4617720" cy="365760"/>
           </a:xfrm>
           <a:prstGeom prst="rect">
@@ -12771,7 +12771,7 @@
         </p:nvSpPr>
         <p:spPr>
           <a:xfrm>
-            <a:off x="640080" y="4937760"/>
+            <a:off x="640080" y="5852160"/>
             <a:ext cx="10881360" cy="457200"/>
           </a:xfrm>
           <a:prstGeom prst="rect">
@@ -12881,12 +12881,12 @@
         </p:nvSpPr>
         <p:spPr>
           <a:xfrm>
-            <a:off x="640080" y="1600200"/>
-            <a:ext cx="6492240" cy="2286000"/>
+            <a:off x="640080" y="1737360"/>
+            <a:ext cx="6492240" cy="3063240"/>
           </a:xfrm>
           <a:prstGeom prst="roundRect">
             <a:avLst>
-              <a:gd name="adj" fmla="val 3600"/>
+              <a:gd name="adj" fmla="val 2687"/>
             </a:avLst>
           </a:prstGeom>
           <a:solidFill>
@@ -12915,7 +12915,7 @@
         </p:nvSpPr>
         <p:spPr>
           <a:xfrm>
-            <a:off x="960120" y="1828800"/>
+            <a:off x="960120" y="1993392"/>
             <a:ext cx="420624" cy="420624"/>
           </a:xfrm>
           <a:prstGeom prst="ellipse">
@@ -12935,7 +12935,7 @@
         </p:nvSpPr>
         <p:spPr>
           <a:xfrm>
-            <a:off x="960120" y="1828800"/>
+            <a:off x="960120" y="1993392"/>
             <a:ext cx="420624" cy="420624"/>
           </a:xfrm>
           <a:prstGeom prst="rect">
@@ -12974,7 +12974,7 @@
         </p:nvSpPr>
         <p:spPr>
           <a:xfrm>
-            <a:off x="1554480" y="1874520"/>
+            <a:off x="1554480" y="2039112"/>
             <a:ext cx="3657600" cy="320040"/>
           </a:xfrm>
           <a:prstGeom prst="rect">
@@ -13013,12 +13013,12 @@
         </p:nvSpPr>
         <p:spPr>
           <a:xfrm>
-            <a:off x="960120" y="2395728"/>
-            <a:ext cx="5852160" cy="566928"/>
+            <a:off x="960120" y="2651760"/>
+            <a:ext cx="5852160" cy="658368"/>
           </a:xfrm>
           <a:prstGeom prst="roundRect">
             <a:avLst>
-              <a:gd name="adj" fmla="val 22581"/>
+              <a:gd name="adj" fmla="val 19444"/>
             </a:avLst>
           </a:prstGeom>
           <a:solidFill>
@@ -13040,8 +13040,8 @@
         </p:nvSpPr>
         <p:spPr>
           <a:xfrm>
-            <a:off x="1106424" y="2395728"/>
-            <a:ext cx="5559552" cy="566928"/>
+            <a:off x="1106424" y="2651760"/>
+            <a:ext cx="5559552" cy="658368"/>
           </a:xfrm>
           <a:prstGeom prst="rect">
             <a:avLst/>
@@ -13079,7 +13079,7 @@
         </p:nvSpPr>
         <p:spPr>
           <a:xfrm>
-            <a:off x="960120" y="3154680"/>
+            <a:off x="960120" y="3584448"/>
             <a:ext cx="1371600" cy="420624"/>
           </a:xfrm>
           <a:prstGeom prst="roundRect">
@@ -13106,7 +13106,7 @@
         </p:nvSpPr>
         <p:spPr>
           <a:xfrm>
-            <a:off x="960120" y="3154680"/>
+            <a:off x="960120" y="3584448"/>
             <a:ext cx="1371600" cy="420624"/>
           </a:xfrm>
           <a:prstGeom prst="rect">
@@ -13145,7 +13145,7 @@
         </p:nvSpPr>
         <p:spPr>
           <a:xfrm>
-            <a:off x="2478024" y="3154680"/>
+            <a:off x="2478024" y="3584448"/>
             <a:ext cx="1732788" cy="420624"/>
           </a:xfrm>
           <a:prstGeom prst="roundRect">
@@ -13172,7 +13172,7 @@
         </p:nvSpPr>
         <p:spPr>
           <a:xfrm>
-            <a:off x="2478024" y="3154680"/>
+            <a:off x="2478024" y="3584448"/>
             <a:ext cx="1732788" cy="420624"/>
           </a:xfrm>
           <a:prstGeom prst="rect">
@@ -13211,7 +13211,7 @@
         </p:nvSpPr>
         <p:spPr>
           <a:xfrm>
-            <a:off x="4357116" y="3154680"/>
+            <a:off x="4357116" y="3584448"/>
             <a:ext cx="1645920" cy="420624"/>
           </a:xfrm>
           <a:prstGeom prst="roundRect">
@@ -13238,7 +13238,7 @@
         </p:nvSpPr>
         <p:spPr>
           <a:xfrm>
-            <a:off x="4357116" y="3154680"/>
+            <a:off x="4357116" y="3584448"/>
             <a:ext cx="1645920" cy="420624"/>
           </a:xfrm>
           <a:prstGeom prst="rect">
@@ -13277,24 +13277,24 @@
         </p:nvSpPr>
         <p:spPr>
           <a:xfrm>
-            <a:off x="960120" y="3675888"/>
-            <a:ext cx="5852160" cy="274320"/>
-          </a:xfrm>
-          <a:prstGeom prst="rect">
-            <a:avLst/>
-          </a:prstGeom>
-          <a:noFill/>
-          <a:ln/>
-        </p:spPr>
-        <p:txBody>
-          <a:bodyPr wrap="square" lIns="0" tIns="0" rIns="0" bIns="0" rtlCol="0" anchor="ctr"/>
-          <a:lstStyle/>
-          <a:p>
-            <a:pPr indent="0" marL="0">
-              <a:buNone/>
-            </a:pPr>
-            <a:r>
-              <a:rPr lang="en-US" sz="1050" i="1" dirty="0">
+            <a:off x="960120" y="4224528"/>
+            <a:ext cx="5852160" cy="365760"/>
+          </a:xfrm>
+          <a:prstGeom prst="rect">
+            <a:avLst/>
+          </a:prstGeom>
+          <a:noFill/>
+          <a:ln/>
+        </p:spPr>
+        <p:txBody>
+          <a:bodyPr wrap="square" lIns="0" tIns="0" rIns="0" bIns="0" rtlCol="0" anchor="ctr"/>
+          <a:lstStyle/>
+          <a:p>
+            <a:pPr indent="0" marL="0">
+              <a:buNone/>
+            </a:pPr>
+            <a:r>
+              <a:rPr lang="en-US" sz="1150" i="1" dirty="0">
                 <a:solidFill>
                   <a:srgbClr val="5C6B78"/>
                 </a:solidFill>
@@ -13304,7 +13304,7 @@
               </a:rPr>
               <a:t>Los botones son tocables: un dedo y listo. Solo estas tres preguntas los llevan.</a:t>
             </a:r>
-            <a:endParaRPr lang="en-US" sz="1050" dirty="0"/>
+            <a:endParaRPr lang="en-US" sz="1150" dirty="0"/>
           </a:p>
         </p:txBody>
       </p:sp>
@@ -13316,12 +13316,12 @@
         </p:nvSpPr>
         <p:spPr>
           <a:xfrm>
-            <a:off x="7498080" y="1600200"/>
-            <a:ext cx="4023360" cy="2286000"/>
+            <a:off x="7498080" y="1737360"/>
+            <a:ext cx="4023360" cy="3063240"/>
           </a:xfrm>
           <a:prstGeom prst="roundRect">
             <a:avLst>
-              <a:gd name="adj" fmla="val 3600"/>
+              <a:gd name="adj" fmla="val 2687"/>
             </a:avLst>
           </a:prstGeom>
           <a:solidFill>
@@ -13350,7 +13350,7 @@
         </p:nvSpPr>
         <p:spPr>
           <a:xfrm>
-            <a:off x="7818120" y="1828800"/>
+            <a:off x="7818120" y="2057400"/>
             <a:ext cx="3383280" cy="274320"/>
           </a:xfrm>
           <a:prstGeom prst="rect">
@@ -13389,24 +13389,24 @@
         </p:nvSpPr>
         <p:spPr>
           <a:xfrm>
-            <a:off x="7818120" y="2240280"/>
-            <a:ext cx="3383280" cy="1463040"/>
-          </a:xfrm>
-          <a:prstGeom prst="rect">
-            <a:avLst/>
-          </a:prstGeom>
-          <a:noFill/>
-          <a:ln/>
-        </p:spPr>
-        <p:txBody>
-          <a:bodyPr wrap="square" lIns="0" tIns="0" rIns="0" bIns="0" rtlCol="0" anchor="ctr"/>
-          <a:lstStyle/>
-          <a:p>
-            <a:pPr indent="0" marL="0">
-              <a:buNone/>
-            </a:pPr>
-            <a:r>
-              <a:rPr lang="en-US" sz="1300" dirty="0">
+            <a:off x="7818120" y="2560320"/>
+            <a:ext cx="3383280" cy="1920240"/>
+          </a:xfrm>
+          <a:prstGeom prst="rect">
+            <a:avLst/>
+          </a:prstGeom>
+          <a:noFill/>
+          <a:ln/>
+        </p:spPr>
+        <p:txBody>
+          <a:bodyPr wrap="square" lIns="0" tIns="0" rIns="0" bIns="0" rtlCol="0" anchor="ctr"/>
+          <a:lstStyle/>
+          <a:p>
+            <a:pPr indent="0" marL="0">
+              <a:buNone/>
+            </a:pPr>
+            <a:r>
+              <a:rPr lang="en-US" sz="1400" dirty="0">
                 <a:solidFill>
                   <a:srgbClr val="FFFFFF"/>
                 </a:solidFill>
@@ -13416,7 +13416,7 @@
               </a:rPr>
               <a:t>Abre la conversación sin sonar a interrogatorio, y desde aquí el bot sabe si hablarle de plusvalía o de su casa.</a:t>
             </a:r>
-            <a:endParaRPr lang="en-US" sz="1300" dirty="0"/>
+            <a:endParaRPr lang="en-US" sz="1400" dirty="0"/>
           </a:p>
         </p:txBody>
       </p:sp>
@@ -13428,12 +13428,12 @@
         </p:nvSpPr>
         <p:spPr>
           <a:xfrm>
-            <a:off x="640080" y="4160520"/>
-            <a:ext cx="10881360" cy="1051560"/>
+            <a:off x="640080" y="5029200"/>
+            <a:ext cx="10881360" cy="1188720"/>
           </a:xfrm>
           <a:prstGeom prst="roundRect">
             <a:avLst>
-              <a:gd name="adj" fmla="val 7826"/>
+              <a:gd name="adj" fmla="val 6923"/>
             </a:avLst>
           </a:prstGeom>
           <a:solidFill>
@@ -13462,24 +13462,24 @@
         </p:nvSpPr>
         <p:spPr>
           <a:xfrm>
-            <a:off x="1005840" y="4160520"/>
-            <a:ext cx="10149840" cy="1051560"/>
-          </a:xfrm>
-          <a:prstGeom prst="rect">
-            <a:avLst/>
-          </a:prstGeom>
-          <a:noFill/>
-          <a:ln/>
-        </p:spPr>
-        <p:txBody>
-          <a:bodyPr wrap="square" lIns="0" tIns="0" rIns="0" bIns="0" rtlCol="0" anchor="ctr"/>
-          <a:lstStyle/>
-          <a:p>
-            <a:pPr indent="0" marL="0">
-              <a:buNone/>
-            </a:pPr>
-            <a:r>
-              <a:rPr lang="en-US" sz="1350" dirty="0">
+            <a:off x="1005840" y="5029200"/>
+            <a:ext cx="10149840" cy="1188720"/>
+          </a:xfrm>
+          <a:prstGeom prst="rect">
+            <a:avLst/>
+          </a:prstGeom>
+          <a:noFill/>
+          <a:ln/>
+        </p:spPr>
+        <p:txBody>
+          <a:bodyPr wrap="square" lIns="0" tIns="0" rIns="0" bIns="0" rtlCol="0" anchor="ctr"/>
+          <a:lstStyle/>
+          <a:p>
+            <a:pPr indent="0" marL="0">
+              <a:buNone/>
+            </a:pPr>
+            <a:r>
+              <a:rPr lang="en-US" sz="1450" dirty="0">
                 <a:solidFill>
                   <a:srgbClr val="11253A"/>
                 </a:solidFill>
@@ -13489,7 +13489,7 @@
               </a:rPr>
               <a:t>No sube ni baja la calificación por sí solo, pero desempata: un inversionista de contado vale más que un curioso.</a:t>
             </a:r>
-            <a:endParaRPr lang="en-US" sz="1350" dirty="0"/>
+            <a:endParaRPr lang="en-US" sz="1450" dirty="0"/>
           </a:p>
         </p:txBody>
       </p:sp>
@@ -13572,12 +13572,12 @@
         </p:nvSpPr>
         <p:spPr>
           <a:xfrm>
-            <a:off x="640080" y="1600200"/>
-            <a:ext cx="6492240" cy="2286000"/>
+            <a:off x="640080" y="1737360"/>
+            <a:ext cx="6492240" cy="3063240"/>
           </a:xfrm>
           <a:prstGeom prst="roundRect">
             <a:avLst>
-              <a:gd name="adj" fmla="val 3600"/>
+              <a:gd name="adj" fmla="val 2687"/>
             </a:avLst>
           </a:prstGeom>
           <a:solidFill>
@@ -13606,7 +13606,7 @@
         </p:nvSpPr>
         <p:spPr>
           <a:xfrm>
-            <a:off x="960120" y="1828800"/>
+            <a:off x="960120" y="1993392"/>
             <a:ext cx="420624" cy="420624"/>
           </a:xfrm>
           <a:prstGeom prst="ellipse">
@@ -13626,7 +13626,7 @@
         </p:nvSpPr>
         <p:spPr>
           <a:xfrm>
-            <a:off x="960120" y="1828800"/>
+            <a:off x="960120" y="1993392"/>
             <a:ext cx="420624" cy="420624"/>
           </a:xfrm>
           <a:prstGeom prst="rect">
@@ -13665,7 +13665,7 @@
         </p:nvSpPr>
         <p:spPr>
           <a:xfrm>
-            <a:off x="1554480" y="1874520"/>
+            <a:off x="1554480" y="2039112"/>
             <a:ext cx="3657600" cy="320040"/>
           </a:xfrm>
           <a:prstGeom prst="rect">
@@ -13704,12 +13704,12 @@
         </p:nvSpPr>
         <p:spPr>
           <a:xfrm>
-            <a:off x="960120" y="2395728"/>
-            <a:ext cx="5852160" cy="566928"/>
+            <a:off x="960120" y="2651760"/>
+            <a:ext cx="5852160" cy="658368"/>
           </a:xfrm>
           <a:prstGeom prst="roundRect">
             <a:avLst>
-              <a:gd name="adj" fmla="val 22581"/>
+              <a:gd name="adj" fmla="val 19444"/>
             </a:avLst>
           </a:prstGeom>
           <a:solidFill>
@@ -13731,8 +13731,8 @@
         </p:nvSpPr>
         <p:spPr>
           <a:xfrm>
-            <a:off x="1106424" y="2395728"/>
-            <a:ext cx="5559552" cy="566928"/>
+            <a:off x="1106424" y="2651760"/>
+            <a:ext cx="5559552" cy="658368"/>
           </a:xfrm>
           <a:prstGeom prst="rect">
             <a:avLst/>
@@ -13770,7 +13770,7 @@
         </p:nvSpPr>
         <p:spPr>
           <a:xfrm>
-            <a:off x="960120" y="3154680"/>
+            <a:off x="960120" y="3584448"/>
             <a:ext cx="1371600" cy="420624"/>
           </a:xfrm>
           <a:prstGeom prst="roundRect">
@@ -13797,7 +13797,7 @@
         </p:nvSpPr>
         <p:spPr>
           <a:xfrm>
-            <a:off x="960120" y="3154680"/>
+            <a:off x="960120" y="3584448"/>
             <a:ext cx="1371600" cy="420624"/>
           </a:xfrm>
           <a:prstGeom prst="rect">
@@ -13836,7 +13836,7 @@
         </p:nvSpPr>
         <p:spPr>
           <a:xfrm>
-            <a:off x="2478024" y="3154680"/>
+            <a:off x="2478024" y="3584448"/>
             <a:ext cx="1371600" cy="420624"/>
           </a:xfrm>
           <a:prstGeom prst="roundRect">
@@ -13863,7 +13863,7 @@
         </p:nvSpPr>
         <p:spPr>
           <a:xfrm>
-            <a:off x="2478024" y="3154680"/>
+            <a:off x="2478024" y="3584448"/>
             <a:ext cx="1371600" cy="420624"/>
           </a:xfrm>
           <a:prstGeom prst="rect">
@@ -13902,7 +13902,7 @@
         </p:nvSpPr>
         <p:spPr>
           <a:xfrm>
-            <a:off x="3995928" y="3154680"/>
+            <a:off x="3995928" y="3584448"/>
             <a:ext cx="1472184" cy="420624"/>
           </a:xfrm>
           <a:prstGeom prst="roundRect">
@@ -13929,7 +13929,7 @@
         </p:nvSpPr>
         <p:spPr>
           <a:xfrm>
-            <a:off x="3995928" y="3154680"/>
+            <a:off x="3995928" y="3584448"/>
             <a:ext cx="1472184" cy="420624"/>
           </a:xfrm>
           <a:prstGeom prst="rect">
@@ -13968,24 +13968,24 @@
         </p:nvSpPr>
         <p:spPr>
           <a:xfrm>
-            <a:off x="960120" y="3675888"/>
-            <a:ext cx="5852160" cy="274320"/>
-          </a:xfrm>
-          <a:prstGeom prst="rect">
-            <a:avLst/>
-          </a:prstGeom>
-          <a:noFill/>
-          <a:ln/>
-        </p:spPr>
-        <p:txBody>
-          <a:bodyPr wrap="square" lIns="0" tIns="0" rIns="0" bIns="0" rtlCol="0" anchor="ctr"/>
-          <a:lstStyle/>
-          <a:p>
-            <a:pPr indent="0" marL="0">
-              <a:buNone/>
-            </a:pPr>
-            <a:r>
-              <a:rPr lang="en-US" sz="1050" i="1" dirty="0">
+            <a:off x="960120" y="4224528"/>
+            <a:ext cx="5852160" cy="365760"/>
+          </a:xfrm>
+          <a:prstGeom prst="rect">
+            <a:avLst/>
+          </a:prstGeom>
+          <a:noFill/>
+          <a:ln/>
+        </p:spPr>
+        <p:txBody>
+          <a:bodyPr wrap="square" lIns="0" tIns="0" rIns="0" bIns="0" rtlCol="0" anchor="ctr"/>
+          <a:lstStyle/>
+          <a:p>
+            <a:pPr indent="0" marL="0">
+              <a:buNone/>
+            </a:pPr>
+            <a:r>
+              <a:rPr lang="en-US" sz="1150" i="1" dirty="0">
                 <a:solidFill>
                   <a:srgbClr val="5C6B78"/>
                 </a:solidFill>
@@ -13995,7 +13995,7 @@
               </a:rPr>
               <a:t>Los botones son tocables: un dedo y listo. Solo estas tres preguntas los llevan.</a:t>
             </a:r>
-            <a:endParaRPr lang="en-US" sz="1050" dirty="0"/>
+            <a:endParaRPr lang="en-US" sz="1150" dirty="0"/>
           </a:p>
         </p:txBody>
       </p:sp>
@@ -14007,12 +14007,12 @@
         </p:nvSpPr>
         <p:spPr>
           <a:xfrm>
-            <a:off x="7498080" y="1600200"/>
-            <a:ext cx="4023360" cy="2286000"/>
+            <a:off x="7498080" y="1737360"/>
+            <a:ext cx="4023360" cy="3063240"/>
           </a:xfrm>
           <a:prstGeom prst="roundRect">
             <a:avLst>
-              <a:gd name="adj" fmla="val 3600"/>
+              <a:gd name="adj" fmla="val 2687"/>
             </a:avLst>
           </a:prstGeom>
           <a:solidFill>
@@ -14041,7 +14041,7 @@
         </p:nvSpPr>
         <p:spPr>
           <a:xfrm>
-            <a:off x="7818120" y="1828800"/>
+            <a:off x="7818120" y="2057400"/>
             <a:ext cx="3383280" cy="274320"/>
           </a:xfrm>
           <a:prstGeom prst="rect">
@@ -14080,24 +14080,24 @@
         </p:nvSpPr>
         <p:spPr>
           <a:xfrm>
-            <a:off x="7818120" y="2240280"/>
-            <a:ext cx="3383280" cy="1463040"/>
-          </a:xfrm>
-          <a:prstGeom prst="rect">
-            <a:avLst/>
-          </a:prstGeom>
-          <a:noFill/>
-          <a:ln/>
-        </p:spPr>
-        <p:txBody>
-          <a:bodyPr wrap="square" lIns="0" tIns="0" rIns="0" bIns="0" rtlCol="0" anchor="ctr"/>
-          <a:lstStyle/>
-          <a:p>
-            <a:pPr indent="0" marL="0">
-              <a:buNone/>
-            </a:pPr>
-            <a:r>
-              <a:rPr lang="en-US" sz="1300" dirty="0">
+            <a:off x="7818120" y="2560320"/>
+            <a:ext cx="3383280" cy="1920240"/>
+          </a:xfrm>
+          <a:prstGeom prst="rect">
+            <a:avLst/>
+          </a:prstGeom>
+          <a:noFill/>
+          <a:ln/>
+        </p:spPr>
+        <p:txBody>
+          <a:bodyPr wrap="square" lIns="0" tIns="0" rIns="0" bIns="0" rtlCol="0" anchor="ctr"/>
+          <a:lstStyle/>
+          <a:p>
+            <a:pPr indent="0" marL="0">
+              <a:buNone/>
+            </a:pPr>
+            <a:r>
+              <a:rPr lang="en-US" sz="1400" dirty="0">
                 <a:solidFill>
                   <a:srgbClr val="FFFFFF"/>
                 </a:solidFill>
@@ -14107,7 +14107,7 @@
               </a:rPr>
               <a:t>Va en segundo lugar a propósito: es la pregunta que más separa al curioso del comprador.</a:t>
             </a:r>
-            <a:endParaRPr lang="en-US" sz="1300" dirty="0"/>
+            <a:endParaRPr lang="en-US" sz="1400" dirty="0"/>
           </a:p>
         </p:txBody>
       </p:sp>
@@ -14119,12 +14119,12 @@
         </p:nvSpPr>
         <p:spPr>
           <a:xfrm>
-            <a:off x="640080" y="4160520"/>
-            <a:ext cx="10881360" cy="1051560"/>
+            <a:off x="640080" y="5029200"/>
+            <a:ext cx="10881360" cy="1188720"/>
           </a:xfrm>
           <a:prstGeom prst="roundRect">
             <a:avLst>
-              <a:gd name="adj" fmla="val 7826"/>
+              <a:gd name="adj" fmla="val 6923"/>
             </a:avLst>
           </a:prstGeom>
           <a:solidFill>
@@ -14153,24 +14153,24 @@
         </p:nvSpPr>
         <p:spPr>
           <a:xfrm>
-            <a:off x="1005840" y="4160520"/>
-            <a:ext cx="10149840" cy="1051560"/>
-          </a:xfrm>
-          <a:prstGeom prst="rect">
-            <a:avLst/>
-          </a:prstGeom>
-          <a:noFill/>
-          <a:ln/>
-        </p:spPr>
-        <p:txBody>
-          <a:bodyPr wrap="square" lIns="0" tIns="0" rIns="0" bIns="0" rtlCol="0" anchor="ctr"/>
-          <a:lstStyle/>
-          <a:p>
-            <a:pPr indent="0" marL="0">
-              <a:buNone/>
-            </a:pPr>
-            <a:r>
-              <a:rPr lang="en-US" sz="1350" dirty="0">
+            <a:off x="1005840" y="5029200"/>
+            <a:ext cx="10149840" cy="1188720"/>
+          </a:xfrm>
+          <a:prstGeom prst="rect">
+            <a:avLst/>
+          </a:prstGeom>
+          <a:noFill/>
+          <a:ln/>
+        </p:spPr>
+        <p:txBody>
+          <a:bodyPr wrap="square" lIns="0" tIns="0" rIns="0" bIns="0" rtlCol="0" anchor="ctr"/>
+          <a:lstStyle/>
+          <a:p>
+            <a:pPr indent="0" marL="0">
+              <a:buNone/>
+            </a:pPr>
+            <a:r>
+              <a:rPr lang="en-US" sz="1450" dirty="0">
                 <a:solidFill>
                   <a:srgbClr val="11253A"/>
                 </a:solidFill>
@@ -14180,7 +14180,7 @@
               </a:rPr>
               <a:t>Quien contesta "solo cotizando" nunca queda como caliente, pague como pague. Es la regla que evita falsas alarmas.</a:t>
             </a:r>
-            <a:endParaRPr lang="en-US" sz="1350" dirty="0"/>
+            <a:endParaRPr lang="en-US" sz="1450" dirty="0"/>
           </a:p>
         </p:txBody>
       </p:sp>

--- a/presentacion/sistema-ciudad-maderas.pptx
+++ b/presentacion/sistema-ciudad-maderas.pptx
@@ -2573,13 +2573,6 @@
             </a:solidFill>
             <a:prstDash val="solid"/>
           </a:ln>
-          <a:effectLst>
-            <a:outerShdw sx="100000" sy="100000" kx="0" ky="0" algn="bl" rotWithShape="0" blurRad="127000" dist="25400" dir="5400000">
-              <a:srgbClr val="9AA7B2">
-                <a:alpha val="18000"/>
-              </a:srgbClr>
-            </a:outerShdw>
-          </a:effectLst>
         </p:spPr>
       </p:sp>
       <p:sp>
@@ -3008,13 +3001,6 @@
             </a:solidFill>
             <a:prstDash val="solid"/>
           </a:ln>
-          <a:effectLst>
-            <a:outerShdw sx="100000" sy="100000" kx="0" ky="0" algn="bl" rotWithShape="0" blurRad="127000" dist="25400" dir="5400000">
-              <a:srgbClr val="9AA7B2">
-                <a:alpha val="18000"/>
-              </a:srgbClr>
-            </a:outerShdw>
-          </a:effectLst>
         </p:spPr>
       </p:sp>
       <p:sp>
@@ -3120,13 +3106,6 @@
             </a:solidFill>
             <a:prstDash val="solid"/>
           </a:ln>
-          <a:effectLst>
-            <a:outerShdw sx="100000" sy="100000" kx="0" ky="0" algn="bl" rotWithShape="0" blurRad="127000" dist="25400" dir="5400000">
-              <a:srgbClr val="9AA7B2">
-                <a:alpha val="18000"/>
-              </a:srgbClr>
-            </a:outerShdw>
-          </a:effectLst>
         </p:spPr>
       </p:sp>
       <p:sp>
@@ -3303,13 +3282,6 @@
             </a:solidFill>
             <a:prstDash val="solid"/>
           </a:ln>
-          <a:effectLst>
-            <a:outerShdw sx="100000" sy="100000" kx="0" ky="0" algn="bl" rotWithShape="0" blurRad="127000" dist="25400" dir="5400000">
-              <a:srgbClr val="9AA7B2">
-                <a:alpha val="18000"/>
-              </a:srgbClr>
-            </a:outerShdw>
-          </a:effectLst>
         </p:spPr>
       </p:sp>
       <p:sp>
@@ -3501,13 +3473,6 @@
             </a:solidFill>
             <a:prstDash val="solid"/>
           </a:ln>
-          <a:effectLst>
-            <a:outerShdw sx="100000" sy="100000" kx="0" ky="0" algn="bl" rotWithShape="0" blurRad="127000" dist="25400" dir="5400000">
-              <a:srgbClr val="9AA7B2">
-                <a:alpha val="18000"/>
-              </a:srgbClr>
-            </a:outerShdw>
-          </a:effectLst>
         </p:spPr>
       </p:sp>
       <p:sp>
@@ -3699,13 +3664,6 @@
             </a:solidFill>
             <a:prstDash val="solid"/>
           </a:ln>
-          <a:effectLst>
-            <a:outerShdw sx="100000" sy="100000" kx="0" ky="0" algn="bl" rotWithShape="0" blurRad="127000" dist="25400" dir="5400000">
-              <a:srgbClr val="9AA7B2">
-                <a:alpha val="18000"/>
-              </a:srgbClr>
-            </a:outerShdw>
-          </a:effectLst>
         </p:spPr>
       </p:sp>
       <p:sp>
@@ -3882,13 +3840,6 @@
             </a:solidFill>
             <a:prstDash val="solid"/>
           </a:ln>
-          <a:effectLst>
-            <a:outerShdw sx="100000" sy="100000" kx="0" ky="0" algn="bl" rotWithShape="0" blurRad="127000" dist="25400" dir="5400000">
-              <a:srgbClr val="9AA7B2">
-                <a:alpha val="18000"/>
-              </a:srgbClr>
-            </a:outerShdw>
-          </a:effectLst>
         </p:spPr>
       </p:sp>
       <p:sp>
@@ -4103,13 +4054,6 @@
             </a:solidFill>
             <a:prstDash val="solid"/>
           </a:ln>
-          <a:effectLst>
-            <a:outerShdw sx="100000" sy="100000" kx="0" ky="0" algn="bl" rotWithShape="0" blurRad="127000" dist="25400" dir="5400000">
-              <a:srgbClr val="9AA7B2">
-                <a:alpha val="18000"/>
-              </a:srgbClr>
-            </a:outerShdw>
-          </a:effectLst>
         </p:spPr>
       </p:sp>
       <p:sp>
@@ -4301,13 +4245,6 @@
             </a:solidFill>
             <a:prstDash val="solid"/>
           </a:ln>
-          <a:effectLst>
-            <a:outerShdw sx="100000" sy="100000" kx="0" ky="0" algn="bl" rotWithShape="0" blurRad="127000" dist="25400" dir="5400000">
-              <a:srgbClr val="9AA7B2">
-                <a:alpha val="18000"/>
-              </a:srgbClr>
-            </a:outerShdw>
-          </a:effectLst>
         </p:spPr>
       </p:sp>
       <p:sp>
@@ -5521,13 +5458,6 @@
             </a:solidFill>
             <a:prstDash val="solid"/>
           </a:ln>
-          <a:effectLst>
-            <a:outerShdw sx="100000" sy="100000" kx="0" ky="0" algn="bl" rotWithShape="0" blurRad="127000" dist="25400" dir="5400000">
-              <a:srgbClr val="9AA7B2">
-                <a:alpha val="18000"/>
-              </a:srgbClr>
-            </a:outerShdw>
-          </a:effectLst>
         </p:spPr>
       </p:sp>
       <p:sp>
@@ -5658,13 +5588,6 @@
             </a:solidFill>
             <a:prstDash val="solid"/>
           </a:ln>
-          <a:effectLst>
-            <a:outerShdw sx="100000" sy="100000" kx="0" ky="0" algn="bl" rotWithShape="0" blurRad="127000" dist="25400" dir="5400000">
-              <a:srgbClr val="9AA7B2">
-                <a:alpha val="18000"/>
-              </a:srgbClr>
-            </a:outerShdw>
-          </a:effectLst>
         </p:spPr>
       </p:sp>
       <p:sp>
@@ -6285,14 +6208,12 @@
           <a:solidFill>
             <a:srgbClr val="FFFFFF"/>
           </a:solidFill>
-          <a:ln/>
-          <a:effectLst>
-            <a:outerShdw sx="100000" sy="100000" kx="0" ky="0" algn="bl" rotWithShape="0" blurRad="203200" dist="38100" dir="5400000">
-              <a:srgbClr val="000000">
-                <a:alpha val="30000"/>
-              </a:srgbClr>
-            </a:outerShdw>
-          </a:effectLst>
+          <a:ln w="12700">
+            <a:solidFill>
+              <a:srgbClr val="C9D4DC"/>
+            </a:solidFill>
+            <a:prstDash val="solid"/>
+          </a:ln>
         </p:spPr>
       </p:sp>
       <p:sp>
@@ -7015,13 +6936,6 @@
             </a:solidFill>
             <a:prstDash val="solid"/>
           </a:ln>
-          <a:effectLst>
-            <a:outerShdw sx="100000" sy="100000" kx="0" ky="0" algn="bl" rotWithShape="0" blurRad="127000" dist="25400" dir="5400000">
-              <a:srgbClr val="9AA7B2">
-                <a:alpha val="18000"/>
-              </a:srgbClr>
-            </a:outerShdw>
-          </a:effectLst>
         </p:spPr>
       </p:sp>
       <p:sp>
@@ -7150,13 +7064,6 @@
             </a:solidFill>
             <a:prstDash val="solid"/>
           </a:ln>
-          <a:effectLst>
-            <a:outerShdw sx="100000" sy="100000" kx="0" ky="0" algn="bl" rotWithShape="0" blurRad="127000" dist="25400" dir="5400000">
-              <a:srgbClr val="9AA7B2">
-                <a:alpha val="18000"/>
-              </a:srgbClr>
-            </a:outerShdw>
-          </a:effectLst>
         </p:spPr>
       </p:sp>
       <p:sp>
@@ -8671,13 +8578,6 @@
             </a:solidFill>
             <a:prstDash val="solid"/>
           </a:ln>
-          <a:effectLst>
-            <a:outerShdw sx="100000" sy="100000" kx="0" ky="0" algn="bl" rotWithShape="0" blurRad="127000" dist="25400" dir="5400000">
-              <a:srgbClr val="9AA7B2">
-                <a:alpha val="18000"/>
-              </a:srgbClr>
-            </a:outerShdw>
-          </a:effectLst>
         </p:spPr>
       </p:sp>
       <p:sp>
@@ -8842,13 +8742,6 @@
             </a:solidFill>
             <a:prstDash val="solid"/>
           </a:ln>
-          <a:effectLst>
-            <a:outerShdw sx="100000" sy="100000" kx="0" ky="0" algn="bl" rotWithShape="0" blurRad="127000" dist="25400" dir="5400000">
-              <a:srgbClr val="9AA7B2">
-                <a:alpha val="18000"/>
-              </a:srgbClr>
-            </a:outerShdw>
-          </a:effectLst>
         </p:spPr>
       </p:sp>
       <p:sp>
@@ -9013,13 +8906,6 @@
             </a:solidFill>
             <a:prstDash val="solid"/>
           </a:ln>
-          <a:effectLst>
-            <a:outerShdw sx="100000" sy="100000" kx="0" ky="0" algn="bl" rotWithShape="0" blurRad="127000" dist="25400" dir="5400000">
-              <a:srgbClr val="9AA7B2">
-                <a:alpha val="18000"/>
-              </a:srgbClr>
-            </a:outerShdw>
-          </a:effectLst>
         </p:spPr>
       </p:sp>
       <p:sp>
@@ -9333,13 +9219,6 @@
             </a:solidFill>
             <a:prstDash val="solid"/>
           </a:ln>
-          <a:effectLst>
-            <a:outerShdw sx="100000" sy="100000" kx="0" ky="0" algn="bl" rotWithShape="0" blurRad="127000" dist="25400" dir="5400000">
-              <a:srgbClr val="9AA7B2">
-                <a:alpha val="18000"/>
-              </a:srgbClr>
-            </a:outerShdw>
-          </a:effectLst>
         </p:spPr>
       </p:sp>
       <p:sp>
@@ -9577,13 +9456,6 @@
             </a:solidFill>
             <a:prstDash val="solid"/>
           </a:ln>
-          <a:effectLst>
-            <a:outerShdw sx="100000" sy="100000" kx="0" ky="0" algn="bl" rotWithShape="0" blurRad="127000" dist="25400" dir="5400000">
-              <a:srgbClr val="9AA7B2">
-                <a:alpha val="18000"/>
-              </a:srgbClr>
-            </a:outerShdw>
-          </a:effectLst>
         </p:spPr>
       </p:sp>
       <p:sp>
@@ -9821,13 +9693,6 @@
             </a:solidFill>
             <a:prstDash val="solid"/>
           </a:ln>
-          <a:effectLst>
-            <a:outerShdw sx="100000" sy="100000" kx="0" ky="0" algn="bl" rotWithShape="0" blurRad="127000" dist="25400" dir="5400000">
-              <a:srgbClr val="9AA7B2">
-                <a:alpha val="18000"/>
-              </a:srgbClr>
-            </a:outerShdw>
-          </a:effectLst>
         </p:spPr>
       </p:sp>
       <p:sp>
@@ -10065,13 +9930,6 @@
             </a:solidFill>
             <a:prstDash val="solid"/>
           </a:ln>
-          <a:effectLst>
-            <a:outerShdw sx="100000" sy="100000" kx="0" ky="0" algn="bl" rotWithShape="0" blurRad="127000" dist="25400" dir="5400000">
-              <a:srgbClr val="9AA7B2">
-                <a:alpha val="18000"/>
-              </a:srgbClr>
-            </a:outerShdw>
-          </a:effectLst>
         </p:spPr>
       </p:sp>
       <p:sp>
@@ -10309,13 +10167,6 @@
             </a:solidFill>
             <a:prstDash val="solid"/>
           </a:ln>
-          <a:effectLst>
-            <a:outerShdw sx="100000" sy="100000" kx="0" ky="0" algn="bl" rotWithShape="0" blurRad="127000" dist="25400" dir="5400000">
-              <a:srgbClr val="9AA7B2">
-                <a:alpha val="18000"/>
-              </a:srgbClr>
-            </a:outerShdw>
-          </a:effectLst>
         </p:spPr>
       </p:sp>
       <p:sp>
@@ -10663,13 +10514,6 @@
             </a:solidFill>
             <a:prstDash val="solid"/>
           </a:ln>
-          <a:effectLst>
-            <a:outerShdw sx="100000" sy="100000" kx="0" ky="0" algn="bl" rotWithShape="0" blurRad="127000" dist="25400" dir="5400000">
-              <a:srgbClr val="9AA7B2">
-                <a:alpha val="18000"/>
-              </a:srgbClr>
-            </a:outerShdw>
-          </a:effectLst>
         </p:spPr>
       </p:sp>
       <p:sp>
@@ -10841,13 +10685,6 @@
             </a:solidFill>
             <a:prstDash val="solid"/>
           </a:ln>
-          <a:effectLst>
-            <a:outerShdw sx="100000" sy="100000" kx="0" ky="0" algn="bl" rotWithShape="0" blurRad="127000" dist="25400" dir="5400000">
-              <a:srgbClr val="9AA7B2">
-                <a:alpha val="18000"/>
-              </a:srgbClr>
-            </a:outerShdw>
-          </a:effectLst>
         </p:spPr>
       </p:sp>
       <p:sp>
@@ -11019,13 +10856,6 @@
             </a:solidFill>
             <a:prstDash val="solid"/>
           </a:ln>
-          <a:effectLst>
-            <a:outerShdw sx="100000" sy="100000" kx="0" ky="0" algn="bl" rotWithShape="0" blurRad="127000" dist="25400" dir="5400000">
-              <a:srgbClr val="9AA7B2">
-                <a:alpha val="18000"/>
-              </a:srgbClr>
-            </a:outerShdw>
-          </a:effectLst>
         </p:spPr>
       </p:sp>
       <p:sp>
@@ -11197,13 +11027,6 @@
             </a:solidFill>
             <a:prstDash val="solid"/>
           </a:ln>
-          <a:effectLst>
-            <a:outerShdw sx="100000" sy="100000" kx="0" ky="0" algn="bl" rotWithShape="0" blurRad="127000" dist="25400" dir="5400000">
-              <a:srgbClr val="9AA7B2">
-                <a:alpha val="18000"/>
-              </a:srgbClr>
-            </a:outerShdw>
-          </a:effectLst>
         </p:spPr>
       </p:sp>
       <p:sp>
@@ -12300,13 +12123,6 @@
             </a:solidFill>
             <a:prstDash val="solid"/>
           </a:ln>
-          <a:effectLst>
-            <a:outerShdw sx="100000" sy="100000" kx="0" ky="0" algn="bl" rotWithShape="0" blurRad="127000" dist="25400" dir="5400000">
-              <a:srgbClr val="9AA7B2">
-                <a:alpha val="18000"/>
-              </a:srgbClr>
-            </a:outerShdw>
-          </a:effectLst>
         </p:spPr>
       </p:sp>
       <p:sp>
@@ -12544,13 +12360,6 @@
             </a:solidFill>
             <a:prstDash val="solid"/>
           </a:ln>
-          <a:effectLst>
-            <a:outerShdw sx="100000" sy="100000" kx="0" ky="0" algn="bl" rotWithShape="0" blurRad="127000" dist="25400" dir="5400000">
-              <a:srgbClr val="9AA7B2">
-                <a:alpha val="18000"/>
-              </a:srgbClr>
-            </a:outerShdw>
-          </a:effectLst>
         </p:spPr>
       </p:sp>
       <p:sp>
@@ -12898,13 +12707,6 @@
             </a:solidFill>
             <a:prstDash val="solid"/>
           </a:ln>
-          <a:effectLst>
-            <a:outerShdw sx="100000" sy="100000" kx="0" ky="0" algn="bl" rotWithShape="0" blurRad="127000" dist="25400" dir="5400000">
-              <a:srgbClr val="9AA7B2">
-                <a:alpha val="18000"/>
-              </a:srgbClr>
-            </a:outerShdw>
-          </a:effectLst>
         </p:spPr>
       </p:sp>
       <p:sp>
@@ -13333,13 +13135,6 @@
             </a:solidFill>
             <a:prstDash val="solid"/>
           </a:ln>
-          <a:effectLst>
-            <a:outerShdw sx="100000" sy="100000" kx="0" ky="0" algn="bl" rotWithShape="0" blurRad="127000" dist="25400" dir="5400000">
-              <a:srgbClr val="9AA7B2">
-                <a:alpha val="18000"/>
-              </a:srgbClr>
-            </a:outerShdw>
-          </a:effectLst>
         </p:spPr>
       </p:sp>
       <p:sp>
@@ -13445,13 +13240,6 @@
             </a:solidFill>
             <a:prstDash val="solid"/>
           </a:ln>
-          <a:effectLst>
-            <a:outerShdw sx="100000" sy="100000" kx="0" ky="0" algn="bl" rotWithShape="0" blurRad="127000" dist="25400" dir="5400000">
-              <a:srgbClr val="9AA7B2">
-                <a:alpha val="18000"/>
-              </a:srgbClr>
-            </a:outerShdw>
-          </a:effectLst>
         </p:spPr>
       </p:sp>
       <p:sp>
@@ -13589,13 +13377,6 @@
             </a:solidFill>
             <a:prstDash val="solid"/>
           </a:ln>
-          <a:effectLst>
-            <a:outerShdw sx="100000" sy="100000" kx="0" ky="0" algn="bl" rotWithShape="0" blurRad="127000" dist="25400" dir="5400000">
-              <a:srgbClr val="9AA7B2">
-                <a:alpha val="18000"/>
-              </a:srgbClr>
-            </a:outerShdw>
-          </a:effectLst>
         </p:spPr>
       </p:sp>
       <p:sp>
@@ -14024,13 +13805,6 @@
             </a:solidFill>
             <a:prstDash val="solid"/>
           </a:ln>
-          <a:effectLst>
-            <a:outerShdw sx="100000" sy="100000" kx="0" ky="0" algn="bl" rotWithShape="0" blurRad="127000" dist="25400" dir="5400000">
-              <a:srgbClr val="9AA7B2">
-                <a:alpha val="18000"/>
-              </a:srgbClr>
-            </a:outerShdw>
-          </a:effectLst>
         </p:spPr>
       </p:sp>
       <p:sp>
@@ -14136,13 +13910,6 @@
             </a:solidFill>
             <a:prstDash val="solid"/>
           </a:ln>
-          <a:effectLst>
-            <a:outerShdw sx="100000" sy="100000" kx="0" ky="0" algn="bl" rotWithShape="0" blurRad="127000" dist="25400" dir="5400000">
-              <a:srgbClr val="9AA7B2">
-                <a:alpha val="18000"/>
-              </a:srgbClr>
-            </a:outerShdw>
-          </a:effectLst>
         </p:spPr>
       </p:sp>
       <p:sp>
